--- a/Zeroth review- Voice AI.pptx
+++ b/Zeroth review- Voice AI.pptx
@@ -2,7 +2,7 @@
 <file path=ppt/presentation.xml><?xml version="1.0" encoding="utf-8"?>
 <p:presentation xmlns:a="http://schemas.openxmlformats.org/drawingml/2006/main" xmlns:r="http://schemas.openxmlformats.org/officeDocument/2006/relationships" xmlns:p="http://schemas.openxmlformats.org/presentationml/2006/main" saveSubsetFonts="1">
   <p:sldMasterIdLst>
-    <p:sldMasterId id="2147483648" r:id="rId1"/>
+    <p:sldMasterId id="2147483690" r:id="rId1"/>
   </p:sldMasterIdLst>
   <p:sldIdLst>
     <p:sldId id="256" r:id="rId2"/>
@@ -23,7 +23,7 @@
     <a:defPPr>
       <a:defRPr lang="en-US"/>
     </a:defPPr>
-    <a:lvl1pPr marL="0" algn="l" defTabSz="914400" rtl="0" eaLnBrk="1" latinLnBrk="0" hangingPunct="1">
+    <a:lvl1pPr marL="0" algn="l" defTabSz="457200" rtl="0" eaLnBrk="1" latinLnBrk="0" hangingPunct="1">
       <a:defRPr sz="1800" kern="1200">
         <a:solidFill>
           <a:schemeClr val="tx1"/>
@@ -33,7 +33,7 @@
         <a:cs typeface="+mn-cs"/>
       </a:defRPr>
     </a:lvl1pPr>
-    <a:lvl2pPr marL="457200" algn="l" defTabSz="914400" rtl="0" eaLnBrk="1" latinLnBrk="0" hangingPunct="1">
+    <a:lvl2pPr marL="457200" algn="l" defTabSz="457200" rtl="0" eaLnBrk="1" latinLnBrk="0" hangingPunct="1">
       <a:defRPr sz="1800" kern="1200">
         <a:solidFill>
           <a:schemeClr val="tx1"/>
@@ -43,7 +43,7 @@
         <a:cs typeface="+mn-cs"/>
       </a:defRPr>
     </a:lvl2pPr>
-    <a:lvl3pPr marL="914400" algn="l" defTabSz="914400" rtl="0" eaLnBrk="1" latinLnBrk="0" hangingPunct="1">
+    <a:lvl3pPr marL="914400" algn="l" defTabSz="457200" rtl="0" eaLnBrk="1" latinLnBrk="0" hangingPunct="1">
       <a:defRPr sz="1800" kern="1200">
         <a:solidFill>
           <a:schemeClr val="tx1"/>
@@ -53,7 +53,7 @@
         <a:cs typeface="+mn-cs"/>
       </a:defRPr>
     </a:lvl3pPr>
-    <a:lvl4pPr marL="1371600" algn="l" defTabSz="914400" rtl="0" eaLnBrk="1" latinLnBrk="0" hangingPunct="1">
+    <a:lvl4pPr marL="1371600" algn="l" defTabSz="457200" rtl="0" eaLnBrk="1" latinLnBrk="0" hangingPunct="1">
       <a:defRPr sz="1800" kern="1200">
         <a:solidFill>
           <a:schemeClr val="tx1"/>
@@ -63,7 +63,7 @@
         <a:cs typeface="+mn-cs"/>
       </a:defRPr>
     </a:lvl4pPr>
-    <a:lvl5pPr marL="1828800" algn="l" defTabSz="914400" rtl="0" eaLnBrk="1" latinLnBrk="0" hangingPunct="1">
+    <a:lvl5pPr marL="1828800" algn="l" defTabSz="457200" rtl="0" eaLnBrk="1" latinLnBrk="0" hangingPunct="1">
       <a:defRPr sz="1800" kern="1200">
         <a:solidFill>
           <a:schemeClr val="tx1"/>
@@ -73,7 +73,7 @@
         <a:cs typeface="+mn-cs"/>
       </a:defRPr>
     </a:lvl5pPr>
-    <a:lvl6pPr marL="2286000" algn="l" defTabSz="914400" rtl="0" eaLnBrk="1" latinLnBrk="0" hangingPunct="1">
+    <a:lvl6pPr marL="2286000" algn="l" defTabSz="457200" rtl="0" eaLnBrk="1" latinLnBrk="0" hangingPunct="1">
       <a:defRPr sz="1800" kern="1200">
         <a:solidFill>
           <a:schemeClr val="tx1"/>
@@ -83,7 +83,7 @@
         <a:cs typeface="+mn-cs"/>
       </a:defRPr>
     </a:lvl6pPr>
-    <a:lvl7pPr marL="2743200" algn="l" defTabSz="914400" rtl="0" eaLnBrk="1" latinLnBrk="0" hangingPunct="1">
+    <a:lvl7pPr marL="2743200" algn="l" defTabSz="457200" rtl="0" eaLnBrk="1" latinLnBrk="0" hangingPunct="1">
       <a:defRPr sz="1800" kern="1200">
         <a:solidFill>
           <a:schemeClr val="tx1"/>
@@ -93,7 +93,7 @@
         <a:cs typeface="+mn-cs"/>
       </a:defRPr>
     </a:lvl7pPr>
-    <a:lvl8pPr marL="3200400" algn="l" defTabSz="914400" rtl="0" eaLnBrk="1" latinLnBrk="0" hangingPunct="1">
+    <a:lvl8pPr marL="3200400" algn="l" defTabSz="457200" rtl="0" eaLnBrk="1" latinLnBrk="0" hangingPunct="1">
       <a:defRPr sz="1800" kern="1200">
         <a:solidFill>
           <a:schemeClr val="tx1"/>
@@ -103,7 +103,7 @@
         <a:cs typeface="+mn-cs"/>
       </a:defRPr>
     </a:lvl8pPr>
-    <a:lvl9pPr marL="3657600" algn="l" defTabSz="914400" rtl="0" eaLnBrk="1" latinLnBrk="0" hangingPunct="1">
+    <a:lvl9pPr marL="3657600" algn="l" defTabSz="457200" rtl="0" eaLnBrk="1" latinLnBrk="0" hangingPunct="1">
       <a:defRPr sz="1800" kern="1200">
         <a:solidFill>
           <a:schemeClr val="tx1"/>
@@ -351,7 +351,7 @@
 </file>
 
 <file path=ppt/slideLayouts/slideLayout1.xml><?xml version="1.0" encoding="utf-8"?>
-<p:sldLayout xmlns:a="http://schemas.openxmlformats.org/drawingml/2006/main" xmlns:r="http://schemas.openxmlformats.org/officeDocument/2006/relationships" xmlns:p="http://schemas.openxmlformats.org/presentationml/2006/main" type="title" preserve="1">
+<p:sldLayout xmlns:a="http://schemas.openxmlformats.org/drawingml/2006/main" xmlns:r="http://schemas.openxmlformats.org/officeDocument/2006/relationships" xmlns:p="http://schemas.openxmlformats.org/presentationml/2006/main" showMasterSp="0" type="title" preserve="1">
   <p:cSld name="Title Slide">
     <p:spTree>
       <p:nvGrpSpPr>
@@ -369,51 +369,123 @@
       </p:grpSpPr>
       <p:sp>
         <p:nvSpPr>
-          <p:cNvPr id="2" name="Title 1">
-            <a:extLst>
-              <a:ext uri="{FF2B5EF4-FFF2-40B4-BE49-F238E27FC236}">
-                <a16:creationId xmlns:a16="http://schemas.microsoft.com/office/drawing/2014/main" id="{85ACEDEB-0EAE-2AD8-CFAF-CD858B53EE7C}"/>
-              </a:ext>
-            </a:extLst>
-          </p:cNvPr>
-          <p:cNvSpPr>
-            <a:spLocks noGrp="1"/>
-          </p:cNvSpPr>
-          <p:nvPr>
-            <p:ph type="ctrTitle"/>
-          </p:nvPr>
+          <p:cNvPr id="7" name="Rectangle 6"/>
+          <p:cNvSpPr/>
+          <p:nvPr/>
         </p:nvSpPr>
         <p:spPr>
           <a:xfrm>
-            <a:off x="1524000" y="1122363"/>
-            <a:ext cx="9144000" cy="2387600"/>
+            <a:off x="0" y="761999"/>
+            <a:ext cx="9141619" cy="5334001"/>
+          </a:xfrm>
+          <a:prstGeom prst="rect">
+            <a:avLst/>
+          </a:prstGeom>
+          <a:solidFill>
+            <a:schemeClr val="accent1"/>
+          </a:solidFill>
+          <a:ln>
+            <a:noFill/>
+          </a:ln>
+        </p:spPr>
+        <p:style>
+          <a:lnRef idx="2">
+            <a:schemeClr val="accent1">
+              <a:shade val="50000"/>
+            </a:schemeClr>
+          </a:lnRef>
+          <a:fillRef idx="1">
+            <a:schemeClr val="accent1"/>
+          </a:fillRef>
+          <a:effectRef idx="0">
+            <a:schemeClr val="accent1"/>
+          </a:effectRef>
+          <a:fontRef idx="minor">
+            <a:schemeClr val="lt1"/>
+          </a:fontRef>
+        </p:style>
+      </p:sp>
+      <p:sp>
+        <p:nvSpPr>
+          <p:cNvPr id="8" name="Rectangle 7"/>
+          <p:cNvSpPr/>
+          <p:nvPr/>
+        </p:nvSpPr>
+        <p:spPr>
+          <a:xfrm>
+            <a:off x="9270263" y="761999"/>
+            <a:ext cx="2925318" cy="5334001"/>
+          </a:xfrm>
+          <a:prstGeom prst="rect">
+            <a:avLst/>
+          </a:prstGeom>
+          <a:solidFill>
+            <a:srgbClr val="C8C8C8">
+              <a:alpha val="49804"/>
+            </a:srgbClr>
+          </a:solidFill>
+          <a:ln>
+            <a:noFill/>
+          </a:ln>
+        </p:spPr>
+        <p:style>
+          <a:lnRef idx="2">
+            <a:schemeClr val="accent1">
+              <a:shade val="50000"/>
+            </a:schemeClr>
+          </a:lnRef>
+          <a:fillRef idx="1">
+            <a:schemeClr val="accent1"/>
+          </a:fillRef>
+          <a:effectRef idx="0">
+            <a:schemeClr val="accent1"/>
+          </a:effectRef>
+          <a:fontRef idx="minor">
+            <a:schemeClr val="lt1"/>
+          </a:fontRef>
+        </p:style>
+      </p:sp>
+      <p:sp>
+        <p:nvSpPr>
+          <p:cNvPr id="2" name="Title 1"/>
+          <p:cNvSpPr>
+            <a:spLocks noGrp="1"/>
+          </p:cNvSpPr>
+          <p:nvPr>
+            <p:ph type="ctrTitle"/>
+          </p:nvPr>
+        </p:nvSpPr>
+        <p:spPr>
+          <a:xfrm>
+            <a:off x="1069848" y="1298448"/>
+            <a:ext cx="7315200" cy="3255264"/>
           </a:xfrm>
         </p:spPr>
         <p:txBody>
-          <a:bodyPr anchor="b"/>
+          <a:bodyPr anchor="b">
+            <a:normAutofit/>
+          </a:bodyPr>
           <a:lstStyle>
-            <a:lvl1pPr algn="ctr">
-              <a:defRPr sz="6000"/>
+            <a:lvl1pPr algn="l">
+              <a:defRPr sz="5900" spc="-100" baseline="0">
+                <a:solidFill>
+                  <a:srgbClr val="FFFFFF"/>
+                </a:solidFill>
+              </a:defRPr>
             </a:lvl1pPr>
           </a:lstStyle>
           <a:p>
             <a:r>
-              <a:rPr lang="en-US"/>
+              <a:rPr lang="en-GB"/>
               <a:t>Click to edit Master title style</a:t>
             </a:r>
-            <a:endParaRPr lang="en-IN"/>
-          </a:p>
-        </p:txBody>
-      </p:sp>
-      <p:sp>
-        <p:nvSpPr>
-          <p:cNvPr id="3" name="Subtitle 2">
-            <a:extLst>
-              <a:ext uri="{FF2B5EF4-FFF2-40B4-BE49-F238E27FC236}">
-                <a16:creationId xmlns:a16="http://schemas.microsoft.com/office/drawing/2014/main" id="{CF2FF726-D5EA-3B67-EBA3-7103E5F6B944}"/>
-              </a:ext>
-            </a:extLst>
-          </p:cNvPr>
+            <a:endParaRPr lang="en-US" dirty="0"/>
+          </a:p>
+        </p:txBody>
+      </p:sp>
+      <p:sp>
+        <p:nvSpPr>
+          <p:cNvPr id="3" name="Subtitle 2"/>
           <p:cNvSpPr>
             <a:spLocks noGrp="1"/>
           </p:cNvSpPr>
@@ -423,68 +495,71 @@
         </p:nvSpPr>
         <p:spPr>
           <a:xfrm>
-            <a:off x="1524000" y="3602038"/>
-            <a:ext cx="9144000" cy="1655762"/>
+            <a:off x="1100015" y="4670246"/>
+            <a:ext cx="7315200" cy="914400"/>
           </a:xfrm>
         </p:spPr>
         <p:txBody>
-          <a:bodyPr/>
+          <a:bodyPr anchor="t">
+            <a:normAutofit/>
+          </a:bodyPr>
           <a:lstStyle>
-            <a:lvl1pPr marL="0" indent="0" algn="ctr">
-              <a:buNone/>
-              <a:defRPr sz="2400"/>
+            <a:lvl1pPr marL="0" indent="0" algn="l">
+              <a:buNone/>
+              <a:defRPr sz="2200" cap="none" spc="0" baseline="0">
+                <a:solidFill>
+                  <a:schemeClr val="accent1">
+                    <a:lumMod val="20000"/>
+                    <a:lumOff val="80000"/>
+                  </a:schemeClr>
+                </a:solidFill>
+              </a:defRPr>
             </a:lvl1pPr>
             <a:lvl2pPr marL="457200" indent="0" algn="ctr">
               <a:buNone/>
-              <a:defRPr sz="2000"/>
+              <a:defRPr sz="2200"/>
             </a:lvl2pPr>
             <a:lvl3pPr marL="914400" indent="0" algn="ctr">
               <a:buNone/>
-              <a:defRPr sz="1800"/>
+              <a:defRPr sz="2200"/>
             </a:lvl3pPr>
             <a:lvl4pPr marL="1371600" indent="0" algn="ctr">
               <a:buNone/>
-              <a:defRPr sz="1600"/>
+              <a:defRPr sz="2000"/>
             </a:lvl4pPr>
             <a:lvl5pPr marL="1828800" indent="0" algn="ctr">
               <a:buNone/>
-              <a:defRPr sz="1600"/>
+              <a:defRPr sz="2000"/>
             </a:lvl5pPr>
             <a:lvl6pPr marL="2286000" indent="0" algn="ctr">
               <a:buNone/>
-              <a:defRPr sz="1600"/>
+              <a:defRPr sz="2000"/>
             </a:lvl6pPr>
             <a:lvl7pPr marL="2743200" indent="0" algn="ctr">
               <a:buNone/>
-              <a:defRPr sz="1600"/>
+              <a:defRPr sz="2000"/>
             </a:lvl7pPr>
             <a:lvl8pPr marL="3200400" indent="0" algn="ctr">
               <a:buNone/>
-              <a:defRPr sz="1600"/>
+              <a:defRPr sz="2000"/>
             </a:lvl8pPr>
             <a:lvl9pPr marL="3657600" indent="0" algn="ctr">
               <a:buNone/>
-              <a:defRPr sz="1600"/>
+              <a:defRPr sz="2000"/>
             </a:lvl9pPr>
           </a:lstStyle>
           <a:p>
             <a:r>
-              <a:rPr lang="en-US"/>
+              <a:rPr lang="en-GB"/>
               <a:t>Click to edit Master subtitle style</a:t>
             </a:r>
-            <a:endParaRPr lang="en-IN"/>
-          </a:p>
-        </p:txBody>
-      </p:sp>
-      <p:sp>
-        <p:nvSpPr>
-          <p:cNvPr id="4" name="Date Placeholder 3">
-            <a:extLst>
-              <a:ext uri="{FF2B5EF4-FFF2-40B4-BE49-F238E27FC236}">
-                <a16:creationId xmlns:a16="http://schemas.microsoft.com/office/drawing/2014/main" id="{7E025A49-6F27-597D-F86B-4817AE9203C1}"/>
-              </a:ext>
-            </a:extLst>
-          </p:cNvPr>
+            <a:endParaRPr lang="en-US" dirty="0"/>
+          </a:p>
+        </p:txBody>
+      </p:sp>
+      <p:sp>
+        <p:nvSpPr>
+          <p:cNvPr id="4" name="Date Placeholder 3"/>
           <p:cNvSpPr>
             <a:spLocks noGrp="1"/>
           </p:cNvSpPr>
@@ -499,7 +574,7 @@
           <a:p>
             <a:fld id="{3E594C3D-A39B-4310-B7FD-B60219990675}" type="datetimeFigureOut">
               <a:rPr lang="en-IN" smtClean="0"/>
-              <a:t>27-08-2026</a:t>
+              <a:t>28-08-2026</a:t>
             </a:fld>
             <a:endParaRPr lang="en-IN"/>
           </a:p>
@@ -507,13 +582,7 @@
       </p:sp>
       <p:sp>
         <p:nvSpPr>
-          <p:cNvPr id="5" name="Footer Placeholder 4">
-            <a:extLst>
-              <a:ext uri="{FF2B5EF4-FFF2-40B4-BE49-F238E27FC236}">
-                <a16:creationId xmlns:a16="http://schemas.microsoft.com/office/drawing/2014/main" id="{AF016A2C-E1B3-496A-F719-8BE5F06D400B}"/>
-              </a:ext>
-            </a:extLst>
-          </p:cNvPr>
+          <p:cNvPr id="5" name="Footer Placeholder 4"/>
           <p:cNvSpPr>
             <a:spLocks noGrp="1"/>
           </p:cNvSpPr>
@@ -532,13 +601,7 @@
       </p:sp>
       <p:sp>
         <p:nvSpPr>
-          <p:cNvPr id="6" name="Slide Number Placeholder 5">
-            <a:extLst>
-              <a:ext uri="{FF2B5EF4-FFF2-40B4-BE49-F238E27FC236}">
-                <a16:creationId xmlns:a16="http://schemas.microsoft.com/office/drawing/2014/main" id="{A2A84B72-0393-3CF6-AEBF-C33F2506220A}"/>
-              </a:ext>
-            </a:extLst>
-          </p:cNvPr>
+          <p:cNvPr id="6" name="Slide Number Placeholder 5"/>
           <p:cNvSpPr>
             <a:spLocks noGrp="1"/>
           </p:cNvSpPr>
@@ -562,7 +625,7 @@
     </p:spTree>
     <p:extLst>
       <p:ext uri="{BB962C8B-B14F-4D97-AF65-F5344CB8AC3E}">
-        <p14:creationId xmlns:p14="http://schemas.microsoft.com/office/powerpoint/2010/main" val="2183385936"/>
+        <p14:creationId xmlns:p14="http://schemas.microsoft.com/office/powerpoint/2010/main" val="2387062277"/>
       </p:ext>
     </p:extLst>
   </p:cSld>
@@ -591,13 +654,7 @@
       </p:grpSpPr>
       <p:sp>
         <p:nvSpPr>
-          <p:cNvPr id="2" name="Title 1">
-            <a:extLst>
-              <a:ext uri="{FF2B5EF4-FFF2-40B4-BE49-F238E27FC236}">
-                <a16:creationId xmlns:a16="http://schemas.microsoft.com/office/drawing/2014/main" id="{068AFD33-87CD-B145-490D-1D3199A0C5EF}"/>
-              </a:ext>
-            </a:extLst>
-          </p:cNvPr>
+          <p:cNvPr id="2" name="Title 1"/>
           <p:cNvSpPr>
             <a:spLocks noGrp="1"/>
           </p:cNvSpPr>
@@ -611,22 +668,16 @@
           <a:lstStyle/>
           <a:p>
             <a:r>
-              <a:rPr lang="en-US"/>
+              <a:rPr lang="en-GB"/>
               <a:t>Click to edit Master title style</a:t>
             </a:r>
-            <a:endParaRPr lang="en-IN"/>
-          </a:p>
-        </p:txBody>
-      </p:sp>
-      <p:sp>
-        <p:nvSpPr>
-          <p:cNvPr id="3" name="Vertical Text Placeholder 2">
-            <a:extLst>
-              <a:ext uri="{FF2B5EF4-FFF2-40B4-BE49-F238E27FC236}">
-                <a16:creationId xmlns:a16="http://schemas.microsoft.com/office/drawing/2014/main" id="{7176BD60-CA32-610C-BD48-90EA559F6FD0}"/>
-              </a:ext>
-            </a:extLst>
-          </p:cNvPr>
+            <a:endParaRPr lang="en-US" dirty="0"/>
+          </a:p>
+        </p:txBody>
+      </p:sp>
+      <p:sp>
+        <p:nvSpPr>
+          <p:cNvPr id="3" name="Vertical Text Placeholder 2"/>
           <p:cNvSpPr>
             <a:spLocks noGrp="1"/>
           </p:cNvSpPr>
@@ -636,55 +687,49 @@
         </p:nvSpPr>
         <p:spPr/>
         <p:txBody>
-          <a:bodyPr vert="eaVert"/>
+          <a:bodyPr vert="eaVert" anchor="t"/>
           <a:lstStyle/>
           <a:p>
             <a:pPr lvl="0"/>
             <a:r>
-              <a:rPr lang="en-US"/>
+              <a:rPr lang="en-GB"/>
               <a:t>Click to edit Master text styles</a:t>
             </a:r>
           </a:p>
           <a:p>
             <a:pPr lvl="1"/>
             <a:r>
-              <a:rPr lang="en-US"/>
+              <a:rPr lang="en-GB"/>
               <a:t>Second level</a:t>
             </a:r>
           </a:p>
           <a:p>
             <a:pPr lvl="2"/>
             <a:r>
-              <a:rPr lang="en-US"/>
+              <a:rPr lang="en-GB"/>
               <a:t>Third level</a:t>
             </a:r>
           </a:p>
           <a:p>
             <a:pPr lvl="3"/>
             <a:r>
-              <a:rPr lang="en-US"/>
+              <a:rPr lang="en-GB"/>
               <a:t>Fourth level</a:t>
             </a:r>
           </a:p>
           <a:p>
             <a:pPr lvl="4"/>
             <a:r>
-              <a:rPr lang="en-US"/>
+              <a:rPr lang="en-GB"/>
               <a:t>Fifth level</a:t>
             </a:r>
-            <a:endParaRPr lang="en-IN"/>
-          </a:p>
-        </p:txBody>
-      </p:sp>
-      <p:sp>
-        <p:nvSpPr>
-          <p:cNvPr id="4" name="Date Placeholder 3">
-            <a:extLst>
-              <a:ext uri="{FF2B5EF4-FFF2-40B4-BE49-F238E27FC236}">
-                <a16:creationId xmlns:a16="http://schemas.microsoft.com/office/drawing/2014/main" id="{A2999949-BFDF-0471-024A-4F5DE30171B9}"/>
-              </a:ext>
-            </a:extLst>
-          </p:cNvPr>
+            <a:endParaRPr lang="en-US" dirty="0"/>
+          </a:p>
+        </p:txBody>
+      </p:sp>
+      <p:sp>
+        <p:nvSpPr>
+          <p:cNvPr id="7" name="Date Placeholder 6"/>
           <p:cNvSpPr>
             <a:spLocks noGrp="1"/>
           </p:cNvSpPr>
@@ -699,7 +744,7 @@
           <a:p>
             <a:fld id="{3E594C3D-A39B-4310-B7FD-B60219990675}" type="datetimeFigureOut">
               <a:rPr lang="en-IN" smtClean="0"/>
-              <a:t>27-08-2026</a:t>
+              <a:t>28-08-2026</a:t>
             </a:fld>
             <a:endParaRPr lang="en-IN"/>
           </a:p>
@@ -707,13 +752,7 @@
       </p:sp>
       <p:sp>
         <p:nvSpPr>
-          <p:cNvPr id="5" name="Footer Placeholder 4">
-            <a:extLst>
-              <a:ext uri="{FF2B5EF4-FFF2-40B4-BE49-F238E27FC236}">
-                <a16:creationId xmlns:a16="http://schemas.microsoft.com/office/drawing/2014/main" id="{23DB5717-ABCA-6D55-3A0B-5964CB3C4B5A}"/>
-              </a:ext>
-            </a:extLst>
-          </p:cNvPr>
+          <p:cNvPr id="8" name="Footer Placeholder 7"/>
           <p:cNvSpPr>
             <a:spLocks noGrp="1"/>
           </p:cNvSpPr>
@@ -732,13 +771,7 @@
       </p:sp>
       <p:sp>
         <p:nvSpPr>
-          <p:cNvPr id="6" name="Slide Number Placeholder 5">
-            <a:extLst>
-              <a:ext uri="{FF2B5EF4-FFF2-40B4-BE49-F238E27FC236}">
-                <a16:creationId xmlns:a16="http://schemas.microsoft.com/office/drawing/2014/main" id="{D94F4AE7-FA12-03C0-5E8E-E6856DD510DF}"/>
-              </a:ext>
-            </a:extLst>
-          </p:cNvPr>
+          <p:cNvPr id="9" name="Slide Number Placeholder 8"/>
           <p:cNvSpPr>
             <a:spLocks noGrp="1"/>
           </p:cNvSpPr>
@@ -762,7 +795,7 @@
     </p:spTree>
     <p:extLst>
       <p:ext uri="{BB962C8B-B14F-4D97-AF65-F5344CB8AC3E}">
-        <p14:creationId xmlns:p14="http://schemas.microsoft.com/office/powerpoint/2010/main" val="2579962079"/>
+        <p14:creationId xmlns:p14="http://schemas.microsoft.com/office/powerpoint/2010/main" val="2257801456"/>
       </p:ext>
     </p:extLst>
   </p:cSld>
@@ -791,13 +824,7 @@
       </p:grpSpPr>
       <p:sp>
         <p:nvSpPr>
-          <p:cNvPr id="2" name="Vertical Title 1">
-            <a:extLst>
-              <a:ext uri="{FF2B5EF4-FFF2-40B4-BE49-F238E27FC236}">
-                <a16:creationId xmlns:a16="http://schemas.microsoft.com/office/drawing/2014/main" id="{61F9E2E0-7E93-BE85-A3AF-119D8F4D5A61}"/>
-              </a:ext>
-            </a:extLst>
-          </p:cNvPr>
+          <p:cNvPr id="2" name="Vertical Title 1"/>
           <p:cNvSpPr>
             <a:spLocks noGrp="1"/>
           </p:cNvSpPr>
@@ -807,8 +834,8 @@
         </p:nvSpPr>
         <p:spPr>
           <a:xfrm>
-            <a:off x="8724900" y="365125"/>
-            <a:ext cx="2628900" cy="5811838"/>
+            <a:off x="381000" y="990600"/>
+            <a:ext cx="2819400" cy="4953000"/>
           </a:xfrm>
         </p:spPr>
         <p:txBody>
@@ -816,22 +843,16 @@
           <a:lstStyle/>
           <a:p>
             <a:r>
-              <a:rPr lang="en-US"/>
+              <a:rPr lang="en-GB"/>
               <a:t>Click to edit Master title style</a:t>
             </a:r>
-            <a:endParaRPr lang="en-IN"/>
-          </a:p>
-        </p:txBody>
-      </p:sp>
-      <p:sp>
-        <p:nvSpPr>
-          <p:cNvPr id="3" name="Vertical Text Placeholder 2">
-            <a:extLst>
-              <a:ext uri="{FF2B5EF4-FFF2-40B4-BE49-F238E27FC236}">
-                <a16:creationId xmlns:a16="http://schemas.microsoft.com/office/drawing/2014/main" id="{3B65EB3C-F1CA-8FDC-B4F1-04D1A711B47E}"/>
-              </a:ext>
-            </a:extLst>
-          </p:cNvPr>
+            <a:endParaRPr lang="en-US" dirty="0"/>
+          </a:p>
+        </p:txBody>
+      </p:sp>
+      <p:sp>
+        <p:nvSpPr>
+          <p:cNvPr id="3" name="Vertical Text Placeholder 2"/>
           <p:cNvSpPr>
             <a:spLocks noGrp="1"/>
           </p:cNvSpPr>
@@ -841,60 +862,54 @@
         </p:nvSpPr>
         <p:spPr>
           <a:xfrm>
-            <a:off x="838200" y="365125"/>
-            <a:ext cx="7734300" cy="5811838"/>
+            <a:off x="3867912" y="868680"/>
+            <a:ext cx="7315200" cy="5120640"/>
           </a:xfrm>
         </p:spPr>
         <p:txBody>
-          <a:bodyPr vert="eaVert"/>
+          <a:bodyPr vert="eaVert" anchor="t"/>
           <a:lstStyle/>
           <a:p>
             <a:pPr lvl="0"/>
             <a:r>
-              <a:rPr lang="en-US"/>
+              <a:rPr lang="en-GB"/>
               <a:t>Click to edit Master text styles</a:t>
             </a:r>
           </a:p>
           <a:p>
             <a:pPr lvl="1"/>
             <a:r>
-              <a:rPr lang="en-US"/>
+              <a:rPr lang="en-GB"/>
               <a:t>Second level</a:t>
             </a:r>
           </a:p>
           <a:p>
             <a:pPr lvl="2"/>
             <a:r>
-              <a:rPr lang="en-US"/>
+              <a:rPr lang="en-GB"/>
               <a:t>Third level</a:t>
             </a:r>
           </a:p>
           <a:p>
             <a:pPr lvl="3"/>
             <a:r>
-              <a:rPr lang="en-US"/>
+              <a:rPr lang="en-GB"/>
               <a:t>Fourth level</a:t>
             </a:r>
           </a:p>
           <a:p>
             <a:pPr lvl="4"/>
             <a:r>
-              <a:rPr lang="en-US"/>
+              <a:rPr lang="en-GB"/>
               <a:t>Fifth level</a:t>
             </a:r>
-            <a:endParaRPr lang="en-IN"/>
-          </a:p>
-        </p:txBody>
-      </p:sp>
-      <p:sp>
-        <p:nvSpPr>
-          <p:cNvPr id="4" name="Date Placeholder 3">
-            <a:extLst>
-              <a:ext uri="{FF2B5EF4-FFF2-40B4-BE49-F238E27FC236}">
-                <a16:creationId xmlns:a16="http://schemas.microsoft.com/office/drawing/2014/main" id="{57204F31-D3F8-2E4B-B770-FB00124D9955}"/>
-              </a:ext>
-            </a:extLst>
-          </p:cNvPr>
+            <a:endParaRPr lang="en-US" dirty="0"/>
+          </a:p>
+        </p:txBody>
+      </p:sp>
+      <p:sp>
+        <p:nvSpPr>
+          <p:cNvPr id="7" name="Date Placeholder 6"/>
           <p:cNvSpPr>
             <a:spLocks noGrp="1"/>
           </p:cNvSpPr>
@@ -909,7 +924,7 @@
           <a:p>
             <a:fld id="{3E594C3D-A39B-4310-B7FD-B60219990675}" type="datetimeFigureOut">
               <a:rPr lang="en-IN" smtClean="0"/>
-              <a:t>27-08-2026</a:t>
+              <a:t>28-08-2026</a:t>
             </a:fld>
             <a:endParaRPr lang="en-IN"/>
           </a:p>
@@ -917,13 +932,7 @@
       </p:sp>
       <p:sp>
         <p:nvSpPr>
-          <p:cNvPr id="5" name="Footer Placeholder 4">
-            <a:extLst>
-              <a:ext uri="{FF2B5EF4-FFF2-40B4-BE49-F238E27FC236}">
-                <a16:creationId xmlns:a16="http://schemas.microsoft.com/office/drawing/2014/main" id="{B230DEE1-FE23-9472-61B5-D4DD7ED4A72E}"/>
-              </a:ext>
-            </a:extLst>
-          </p:cNvPr>
+          <p:cNvPr id="8" name="Footer Placeholder 7"/>
           <p:cNvSpPr>
             <a:spLocks noGrp="1"/>
           </p:cNvSpPr>
@@ -942,13 +951,7 @@
       </p:sp>
       <p:sp>
         <p:nvSpPr>
-          <p:cNvPr id="6" name="Slide Number Placeholder 5">
-            <a:extLst>
-              <a:ext uri="{FF2B5EF4-FFF2-40B4-BE49-F238E27FC236}">
-                <a16:creationId xmlns:a16="http://schemas.microsoft.com/office/drawing/2014/main" id="{6994DC47-1A75-4FC2-42B9-E9A62B4D9E7C}"/>
-              </a:ext>
-            </a:extLst>
-          </p:cNvPr>
+          <p:cNvPr id="9" name="Slide Number Placeholder 8"/>
           <p:cNvSpPr>
             <a:spLocks noGrp="1"/>
           </p:cNvSpPr>
@@ -972,7 +975,7 @@
     </p:spTree>
     <p:extLst>
       <p:ext uri="{BB962C8B-B14F-4D97-AF65-F5344CB8AC3E}">
-        <p14:creationId xmlns:p14="http://schemas.microsoft.com/office/powerpoint/2010/main" val="3582014879"/>
+        <p14:creationId xmlns:p14="http://schemas.microsoft.com/office/powerpoint/2010/main" val="1988276594"/>
       </p:ext>
     </p:extLst>
   </p:cSld>
@@ -1001,13 +1004,7 @@
       </p:grpSpPr>
       <p:sp>
         <p:nvSpPr>
-          <p:cNvPr id="2" name="Title 1">
-            <a:extLst>
-              <a:ext uri="{FF2B5EF4-FFF2-40B4-BE49-F238E27FC236}">
-                <a16:creationId xmlns:a16="http://schemas.microsoft.com/office/drawing/2014/main" id="{CF477314-9713-911D-B131-47BF8788A3DE}"/>
-              </a:ext>
-            </a:extLst>
-          </p:cNvPr>
+          <p:cNvPr id="2" name="Title 1"/>
           <p:cNvSpPr>
             <a:spLocks noGrp="1"/>
           </p:cNvSpPr>
@@ -1021,22 +1018,16 @@
           <a:lstStyle/>
           <a:p>
             <a:r>
-              <a:rPr lang="en-US"/>
+              <a:rPr lang="en-GB"/>
               <a:t>Click to edit Master title style</a:t>
             </a:r>
-            <a:endParaRPr lang="en-IN"/>
-          </a:p>
-        </p:txBody>
-      </p:sp>
-      <p:sp>
-        <p:nvSpPr>
-          <p:cNvPr id="3" name="Content Placeholder 2">
-            <a:extLst>
-              <a:ext uri="{FF2B5EF4-FFF2-40B4-BE49-F238E27FC236}">
-                <a16:creationId xmlns:a16="http://schemas.microsoft.com/office/drawing/2014/main" id="{5150A2F2-4491-54E0-BA75-A45AD08A92F9}"/>
-              </a:ext>
-            </a:extLst>
-          </p:cNvPr>
+            <a:endParaRPr lang="en-US" dirty="0"/>
+          </a:p>
+        </p:txBody>
+      </p:sp>
+      <p:sp>
+        <p:nvSpPr>
+          <p:cNvPr id="3" name="Content Placeholder 2"/>
           <p:cNvSpPr>
             <a:spLocks noGrp="1"/>
           </p:cNvSpPr>
@@ -1051,50 +1042,44 @@
           <a:p>
             <a:pPr lvl="0"/>
             <a:r>
-              <a:rPr lang="en-US"/>
+              <a:rPr lang="en-GB"/>
               <a:t>Click to edit Master text styles</a:t>
             </a:r>
           </a:p>
           <a:p>
             <a:pPr lvl="1"/>
             <a:r>
-              <a:rPr lang="en-US"/>
+              <a:rPr lang="en-GB"/>
               <a:t>Second level</a:t>
             </a:r>
           </a:p>
           <a:p>
             <a:pPr lvl="2"/>
             <a:r>
-              <a:rPr lang="en-US"/>
+              <a:rPr lang="en-GB"/>
               <a:t>Third level</a:t>
             </a:r>
           </a:p>
           <a:p>
             <a:pPr lvl="3"/>
             <a:r>
-              <a:rPr lang="en-US"/>
+              <a:rPr lang="en-GB"/>
               <a:t>Fourth level</a:t>
             </a:r>
           </a:p>
           <a:p>
             <a:pPr lvl="4"/>
             <a:r>
-              <a:rPr lang="en-US"/>
+              <a:rPr lang="en-GB"/>
               <a:t>Fifth level</a:t>
             </a:r>
-            <a:endParaRPr lang="en-IN"/>
-          </a:p>
-        </p:txBody>
-      </p:sp>
-      <p:sp>
-        <p:nvSpPr>
-          <p:cNvPr id="4" name="Date Placeholder 3">
-            <a:extLst>
-              <a:ext uri="{FF2B5EF4-FFF2-40B4-BE49-F238E27FC236}">
-                <a16:creationId xmlns:a16="http://schemas.microsoft.com/office/drawing/2014/main" id="{42788CAD-7D7B-238E-86E0-2C40E316E844}"/>
-              </a:ext>
-            </a:extLst>
-          </p:cNvPr>
+            <a:endParaRPr lang="en-US" dirty="0"/>
+          </a:p>
+        </p:txBody>
+      </p:sp>
+      <p:sp>
+        <p:nvSpPr>
+          <p:cNvPr id="4" name="Date Placeholder 3"/>
           <p:cNvSpPr>
             <a:spLocks noGrp="1"/>
           </p:cNvSpPr>
@@ -1109,7 +1094,7 @@
           <a:p>
             <a:fld id="{3E594C3D-A39B-4310-B7FD-B60219990675}" type="datetimeFigureOut">
               <a:rPr lang="en-IN" smtClean="0"/>
-              <a:t>27-08-2026</a:t>
+              <a:t>28-08-2026</a:t>
             </a:fld>
             <a:endParaRPr lang="en-IN"/>
           </a:p>
@@ -1117,13 +1102,7 @@
       </p:sp>
       <p:sp>
         <p:nvSpPr>
-          <p:cNvPr id="5" name="Footer Placeholder 4">
-            <a:extLst>
-              <a:ext uri="{FF2B5EF4-FFF2-40B4-BE49-F238E27FC236}">
-                <a16:creationId xmlns:a16="http://schemas.microsoft.com/office/drawing/2014/main" id="{39DA0B49-85A5-BFE8-5858-E94924CA83AC}"/>
-              </a:ext>
-            </a:extLst>
-          </p:cNvPr>
+          <p:cNvPr id="5" name="Footer Placeholder 4"/>
           <p:cNvSpPr>
             <a:spLocks noGrp="1"/>
           </p:cNvSpPr>
@@ -1142,13 +1121,7 @@
       </p:sp>
       <p:sp>
         <p:nvSpPr>
-          <p:cNvPr id="6" name="Slide Number Placeholder 5">
-            <a:extLst>
-              <a:ext uri="{FF2B5EF4-FFF2-40B4-BE49-F238E27FC236}">
-                <a16:creationId xmlns:a16="http://schemas.microsoft.com/office/drawing/2014/main" id="{94D8CB63-605C-620F-BCB9-7277B0BFF2A4}"/>
-              </a:ext>
-            </a:extLst>
-          </p:cNvPr>
+          <p:cNvPr id="6" name="Slide Number Placeholder 5"/>
           <p:cNvSpPr>
             <a:spLocks noGrp="1"/>
           </p:cNvSpPr>
@@ -1172,7 +1145,7 @@
     </p:spTree>
     <p:extLst>
       <p:ext uri="{BB962C8B-B14F-4D97-AF65-F5344CB8AC3E}">
-        <p14:creationId xmlns:p14="http://schemas.microsoft.com/office/powerpoint/2010/main" val="1868228658"/>
+        <p14:creationId xmlns:p14="http://schemas.microsoft.com/office/powerpoint/2010/main" val="450662266"/>
       </p:ext>
     </p:extLst>
   </p:cSld>
@@ -1201,13 +1174,7 @@
       </p:grpSpPr>
       <p:sp>
         <p:nvSpPr>
-          <p:cNvPr id="2" name="Title 1">
-            <a:extLst>
-              <a:ext uri="{FF2B5EF4-FFF2-40B4-BE49-F238E27FC236}">
-                <a16:creationId xmlns:a16="http://schemas.microsoft.com/office/drawing/2014/main" id="{3AA7CBAF-2BEF-4A8A-589E-D5002BEE7C15}"/>
-              </a:ext>
-            </a:extLst>
-          </p:cNvPr>
+          <p:cNvPr id="2" name="Title 1"/>
           <p:cNvSpPr>
             <a:spLocks noGrp="1"/>
           </p:cNvSpPr>
@@ -1217,35 +1184,38 @@
         </p:nvSpPr>
         <p:spPr>
           <a:xfrm>
-            <a:off x="831850" y="1709738"/>
-            <a:ext cx="10515600" cy="2852737"/>
+            <a:off x="3867912" y="1298448"/>
+            <a:ext cx="7315200" cy="3255264"/>
           </a:xfrm>
         </p:spPr>
         <p:txBody>
-          <a:bodyPr anchor="b"/>
+          <a:bodyPr anchor="b">
+            <a:normAutofit/>
+          </a:bodyPr>
           <a:lstStyle>
             <a:lvl1pPr>
-              <a:defRPr sz="6000"/>
+              <a:defRPr sz="5900" b="0" spc="-100" baseline="0">
+                <a:solidFill>
+                  <a:schemeClr val="tx1">
+                    <a:lumMod val="65000"/>
+                    <a:lumOff val="35000"/>
+                  </a:schemeClr>
+                </a:solidFill>
+              </a:defRPr>
             </a:lvl1pPr>
           </a:lstStyle>
           <a:p>
             <a:r>
-              <a:rPr lang="en-US"/>
+              <a:rPr lang="en-GB"/>
               <a:t>Click to edit Master title style</a:t>
             </a:r>
-            <a:endParaRPr lang="en-IN"/>
-          </a:p>
-        </p:txBody>
-      </p:sp>
-      <p:sp>
-        <p:nvSpPr>
-          <p:cNvPr id="3" name="Text Placeholder 2">
-            <a:extLst>
-              <a:ext uri="{FF2B5EF4-FFF2-40B4-BE49-F238E27FC236}">
-                <a16:creationId xmlns:a16="http://schemas.microsoft.com/office/drawing/2014/main" id="{2119A790-D672-32CE-6B03-DA1CC50EB94E}"/>
-              </a:ext>
-            </a:extLst>
-          </p:cNvPr>
+            <a:endParaRPr lang="en-US" dirty="0"/>
+          </a:p>
+        </p:txBody>
+      </p:sp>
+      <p:sp>
+        <p:nvSpPr>
+          <p:cNvPr id="3" name="Text Placeholder 2"/>
           <p:cNvSpPr>
             <a:spLocks noGrp="1"/>
           </p:cNvSpPr>
@@ -1255,99 +1225,102 @@
         </p:nvSpPr>
         <p:spPr>
           <a:xfrm>
-            <a:off x="831850" y="4589463"/>
-            <a:ext cx="10515600" cy="1500187"/>
+            <a:off x="3886200" y="4672584"/>
+            <a:ext cx="7315200" cy="914400"/>
           </a:xfrm>
         </p:spPr>
         <p:txBody>
-          <a:bodyPr/>
+          <a:bodyPr anchor="t">
+            <a:normAutofit/>
+          </a:bodyPr>
           <a:lstStyle>
             <a:lvl1pPr marL="0" indent="0">
               <a:buNone/>
-              <a:defRPr sz="2400">
+              <a:defRPr sz="2200" cap="none" spc="0" baseline="0">
                 <a:solidFill>
                   <a:schemeClr val="tx1">
-                    <a:tint val="82000"/>
+                    <a:lumMod val="65000"/>
+                    <a:lumOff val="35000"/>
                   </a:schemeClr>
                 </a:solidFill>
               </a:defRPr>
             </a:lvl1pPr>
             <a:lvl2pPr marL="457200" indent="0">
               <a:buNone/>
-              <a:defRPr sz="2000">
+              <a:defRPr sz="1800">
                 <a:solidFill>
                   <a:schemeClr val="tx1">
-                    <a:tint val="82000"/>
+                    <a:tint val="75000"/>
                   </a:schemeClr>
                 </a:solidFill>
               </a:defRPr>
             </a:lvl2pPr>
             <a:lvl3pPr marL="914400" indent="0">
               <a:buNone/>
-              <a:defRPr sz="1800">
+              <a:defRPr sz="1600">
                 <a:solidFill>
                   <a:schemeClr val="tx1">
-                    <a:tint val="82000"/>
+                    <a:tint val="75000"/>
                   </a:schemeClr>
                 </a:solidFill>
               </a:defRPr>
             </a:lvl3pPr>
             <a:lvl4pPr marL="1371600" indent="0">
               <a:buNone/>
-              <a:defRPr sz="1600">
+              <a:defRPr sz="1400">
                 <a:solidFill>
                   <a:schemeClr val="tx1">
-                    <a:tint val="82000"/>
+                    <a:tint val="75000"/>
                   </a:schemeClr>
                 </a:solidFill>
               </a:defRPr>
             </a:lvl4pPr>
             <a:lvl5pPr marL="1828800" indent="0">
               <a:buNone/>
-              <a:defRPr sz="1600">
+              <a:defRPr sz="1400">
                 <a:solidFill>
                   <a:schemeClr val="tx1">
-                    <a:tint val="82000"/>
+                    <a:tint val="75000"/>
                   </a:schemeClr>
                 </a:solidFill>
               </a:defRPr>
             </a:lvl5pPr>
             <a:lvl6pPr marL="2286000" indent="0">
               <a:buNone/>
-              <a:defRPr sz="1600">
+              <a:defRPr sz="1400">
                 <a:solidFill>
                   <a:schemeClr val="tx1">
-                    <a:tint val="82000"/>
+                    <a:tint val="75000"/>
                   </a:schemeClr>
                 </a:solidFill>
               </a:defRPr>
             </a:lvl6pPr>
             <a:lvl7pPr marL="2743200" indent="0">
               <a:buNone/>
-              <a:defRPr sz="1600">
+              <a:defRPr sz="1400">
                 <a:solidFill>
                   <a:schemeClr val="tx1">
-                    <a:tint val="82000"/>
+                    <a:tint val="75000"/>
                   </a:schemeClr>
                 </a:solidFill>
               </a:defRPr>
             </a:lvl7pPr>
             <a:lvl8pPr marL="3200400" indent="0">
               <a:buNone/>
-              <a:defRPr sz="1600">
+              <a:defRPr sz="1400">
                 <a:solidFill>
                   <a:schemeClr val="tx1">
-                    <a:tint val="82000"/>
+                    <a:tint val="75000"/>
                   </a:schemeClr>
                 </a:solidFill>
               </a:defRPr>
             </a:lvl8pPr>
             <a:lvl9pPr marL="3657600" indent="0">
               <a:buNone/>
-              <a:defRPr sz="1600">
+              <a:defRPr sz="1400">
                 <a:solidFill>
                   <a:schemeClr val="tx1">
-                    <a:tint val="82000"/>
+                    <a:tint val="75000"/>
                   </a:schemeClr>
                 </a:solidFill>
               </a:defRPr>
@@ -1356,7 +1329,7 @@
           <a:p>
             <a:pPr lvl="0"/>
             <a:r>
-              <a:rPr lang="en-US"/>
+              <a:rPr lang="en-GB"/>
               <a:t>Click to edit Master text styles</a:t>
             </a:r>
           </a:p>
@@ -1364,13 +1337,7 @@
       </p:sp>
       <p:sp>
         <p:nvSpPr>
-          <p:cNvPr id="4" name="Date Placeholder 3">
-            <a:extLst>
-              <a:ext uri="{FF2B5EF4-FFF2-40B4-BE49-F238E27FC236}">
-                <a16:creationId xmlns:a16="http://schemas.microsoft.com/office/drawing/2014/main" id="{4F6D63FC-096A-DE7E-8788-FF43E6A3E878}"/>
-              </a:ext>
-            </a:extLst>
-          </p:cNvPr>
+          <p:cNvPr id="4" name="Date Placeholder 3"/>
           <p:cNvSpPr>
             <a:spLocks noGrp="1"/>
           </p:cNvSpPr>
@@ -1385,7 +1352,7 @@
           <a:p>
             <a:fld id="{3E594C3D-A39B-4310-B7FD-B60219990675}" type="datetimeFigureOut">
               <a:rPr lang="en-IN" smtClean="0"/>
-              <a:t>27-08-2026</a:t>
+              <a:t>28-08-2026</a:t>
             </a:fld>
             <a:endParaRPr lang="en-IN"/>
           </a:p>
@@ -1393,13 +1360,7 @@
       </p:sp>
       <p:sp>
         <p:nvSpPr>
-          <p:cNvPr id="5" name="Footer Placeholder 4">
-            <a:extLst>
-              <a:ext uri="{FF2B5EF4-FFF2-40B4-BE49-F238E27FC236}">
-                <a16:creationId xmlns:a16="http://schemas.microsoft.com/office/drawing/2014/main" id="{181F6420-9622-0659-43AA-CC1BE1171829}"/>
-              </a:ext>
-            </a:extLst>
-          </p:cNvPr>
+          <p:cNvPr id="5" name="Footer Placeholder 4"/>
           <p:cNvSpPr>
             <a:spLocks noGrp="1"/>
           </p:cNvSpPr>
@@ -1418,13 +1379,7 @@
       </p:sp>
       <p:sp>
         <p:nvSpPr>
-          <p:cNvPr id="6" name="Slide Number Placeholder 5">
-            <a:extLst>
-              <a:ext uri="{FF2B5EF4-FFF2-40B4-BE49-F238E27FC236}">
-                <a16:creationId xmlns:a16="http://schemas.microsoft.com/office/drawing/2014/main" id="{95CE51D2-AD73-ED10-3182-286A1CFBB691}"/>
-              </a:ext>
-            </a:extLst>
-          </p:cNvPr>
+          <p:cNvPr id="6" name="Slide Number Placeholder 5"/>
           <p:cNvSpPr>
             <a:spLocks noGrp="1"/>
           </p:cNvSpPr>
@@ -1448,7 +1403,7 @@
     </p:spTree>
     <p:extLst>
       <p:ext uri="{BB962C8B-B14F-4D97-AF65-F5344CB8AC3E}">
-        <p14:creationId xmlns:p14="http://schemas.microsoft.com/office/powerpoint/2010/main" val="448206410"/>
+        <p14:creationId xmlns:p14="http://schemas.microsoft.com/office/powerpoint/2010/main" val="3910876920"/>
       </p:ext>
     </p:extLst>
   </p:cSld>
@@ -1477,13 +1432,7 @@
       </p:grpSpPr>
       <p:sp>
         <p:nvSpPr>
-          <p:cNvPr id="2" name="Title 1">
-            <a:extLst>
-              <a:ext uri="{FF2B5EF4-FFF2-40B4-BE49-F238E27FC236}">
-                <a16:creationId xmlns:a16="http://schemas.microsoft.com/office/drawing/2014/main" id="{8610518F-6FEC-9203-5829-8DA35B6D9365}"/>
-              </a:ext>
-            </a:extLst>
-          </p:cNvPr>
+          <p:cNvPr id="2" name="Title 1"/>
           <p:cNvSpPr>
             <a:spLocks noGrp="1"/>
           </p:cNvSpPr>
@@ -1497,22 +1446,16 @@
           <a:lstStyle/>
           <a:p>
             <a:r>
-              <a:rPr lang="en-US"/>
+              <a:rPr lang="en-GB"/>
               <a:t>Click to edit Master title style</a:t>
             </a:r>
-            <a:endParaRPr lang="en-IN"/>
-          </a:p>
-        </p:txBody>
-      </p:sp>
-      <p:sp>
-        <p:nvSpPr>
-          <p:cNvPr id="3" name="Content Placeholder 2">
-            <a:extLst>
-              <a:ext uri="{FF2B5EF4-FFF2-40B4-BE49-F238E27FC236}">
-                <a16:creationId xmlns:a16="http://schemas.microsoft.com/office/drawing/2014/main" id="{A06C68E7-E0BE-BEE0-F81C-689E43E5FC9A}"/>
-              </a:ext>
-            </a:extLst>
-          </p:cNvPr>
+            <a:endParaRPr lang="en-US" dirty="0"/>
+          </a:p>
+        </p:txBody>
+      </p:sp>
+      <p:sp>
+        <p:nvSpPr>
+          <p:cNvPr id="3" name="Content Placeholder 2"/>
           <p:cNvSpPr>
             <a:spLocks noGrp="1"/>
           </p:cNvSpPr>
@@ -1522,60 +1465,82 @@
         </p:nvSpPr>
         <p:spPr>
           <a:xfrm>
-            <a:off x="838200" y="1825625"/>
-            <a:ext cx="5181600" cy="4351338"/>
+            <a:off x="3867912" y="868680"/>
+            <a:ext cx="3474720" cy="5120640"/>
           </a:xfrm>
         </p:spPr>
         <p:txBody>
           <a:bodyPr/>
-          <a:lstStyle/>
+          <a:lstStyle>
+            <a:lvl1pPr>
+              <a:defRPr sz="2000"/>
+            </a:lvl1pPr>
+            <a:lvl2pPr>
+              <a:defRPr sz="1800"/>
+            </a:lvl2pPr>
+            <a:lvl3pPr>
+              <a:defRPr sz="1600"/>
+            </a:lvl3pPr>
+            <a:lvl4pPr>
+              <a:defRPr sz="1400"/>
+            </a:lvl4pPr>
+            <a:lvl5pPr>
+              <a:defRPr sz="1400"/>
+            </a:lvl5pPr>
+            <a:lvl6pPr>
+              <a:defRPr sz="1400"/>
+            </a:lvl6pPr>
+            <a:lvl7pPr>
+              <a:defRPr sz="1400"/>
+            </a:lvl7pPr>
+            <a:lvl8pPr>
+              <a:defRPr sz="1400"/>
+            </a:lvl8pPr>
+            <a:lvl9pPr>
+              <a:defRPr sz="1400"/>
+            </a:lvl9pPr>
+          </a:lstStyle>
           <a:p>
             <a:pPr lvl="0"/>
             <a:r>
-              <a:rPr lang="en-US"/>
+              <a:rPr lang="en-GB"/>
               <a:t>Click to edit Master text styles</a:t>
             </a:r>
           </a:p>
           <a:p>
             <a:pPr lvl="1"/>
             <a:r>
-              <a:rPr lang="en-US"/>
+              <a:rPr lang="en-GB"/>
               <a:t>Second level</a:t>
             </a:r>
           </a:p>
           <a:p>
             <a:pPr lvl="2"/>
             <a:r>
-              <a:rPr lang="en-US"/>
+              <a:rPr lang="en-GB"/>
               <a:t>Third level</a:t>
             </a:r>
           </a:p>
           <a:p>
             <a:pPr lvl="3"/>
             <a:r>
-              <a:rPr lang="en-US"/>
+              <a:rPr lang="en-GB"/>
               <a:t>Fourth level</a:t>
             </a:r>
           </a:p>
           <a:p>
             <a:pPr lvl="4"/>
             <a:r>
-              <a:rPr lang="en-US"/>
+              <a:rPr lang="en-GB"/>
               <a:t>Fifth level</a:t>
             </a:r>
-            <a:endParaRPr lang="en-IN"/>
-          </a:p>
-        </p:txBody>
-      </p:sp>
-      <p:sp>
-        <p:nvSpPr>
-          <p:cNvPr id="4" name="Content Placeholder 3">
-            <a:extLst>
-              <a:ext uri="{FF2B5EF4-FFF2-40B4-BE49-F238E27FC236}">
-                <a16:creationId xmlns:a16="http://schemas.microsoft.com/office/drawing/2014/main" id="{EAA4D781-8395-8758-061B-A092E5553BC5}"/>
-              </a:ext>
-            </a:extLst>
-          </p:cNvPr>
+            <a:endParaRPr lang="en-US" dirty="0"/>
+          </a:p>
+        </p:txBody>
+      </p:sp>
+      <p:sp>
+        <p:nvSpPr>
+          <p:cNvPr id="4" name="Content Placeholder 3"/>
           <p:cNvSpPr>
             <a:spLocks noGrp="1"/>
           </p:cNvSpPr>
@@ -1585,60 +1550,82 @@
         </p:nvSpPr>
         <p:spPr>
           <a:xfrm>
-            <a:off x="6172200" y="1825625"/>
-            <a:ext cx="5181600" cy="4351338"/>
+            <a:off x="7818120" y="868680"/>
+            <a:ext cx="3474720" cy="5120640"/>
           </a:xfrm>
         </p:spPr>
         <p:txBody>
           <a:bodyPr/>
-          <a:lstStyle/>
+          <a:lstStyle>
+            <a:lvl1pPr>
+              <a:defRPr sz="2000"/>
+            </a:lvl1pPr>
+            <a:lvl2pPr>
+              <a:defRPr sz="1800"/>
+            </a:lvl2pPr>
+            <a:lvl3pPr>
+              <a:defRPr sz="1600"/>
+            </a:lvl3pPr>
+            <a:lvl4pPr>
+              <a:defRPr sz="1400"/>
+            </a:lvl4pPr>
+            <a:lvl5pPr>
+              <a:defRPr sz="1400"/>
+            </a:lvl5pPr>
+            <a:lvl6pPr>
+              <a:defRPr sz="1400"/>
+            </a:lvl6pPr>
+            <a:lvl7pPr>
+              <a:defRPr sz="1400"/>
+            </a:lvl7pPr>
+            <a:lvl8pPr>
+              <a:defRPr sz="1400"/>
+            </a:lvl8pPr>
+            <a:lvl9pPr>
+              <a:defRPr sz="1400"/>
+            </a:lvl9pPr>
+          </a:lstStyle>
           <a:p>
             <a:pPr lvl="0"/>
             <a:r>
-              <a:rPr lang="en-US"/>
+              <a:rPr lang="en-GB"/>
               <a:t>Click to edit Master text styles</a:t>
             </a:r>
           </a:p>
           <a:p>
             <a:pPr lvl="1"/>
             <a:r>
-              <a:rPr lang="en-US"/>
+              <a:rPr lang="en-GB"/>
               <a:t>Second level</a:t>
             </a:r>
           </a:p>
           <a:p>
             <a:pPr lvl="2"/>
             <a:r>
-              <a:rPr lang="en-US"/>
+              <a:rPr lang="en-GB"/>
               <a:t>Third level</a:t>
             </a:r>
           </a:p>
           <a:p>
             <a:pPr lvl="3"/>
             <a:r>
-              <a:rPr lang="en-US"/>
+              <a:rPr lang="en-GB"/>
               <a:t>Fourth level</a:t>
             </a:r>
           </a:p>
           <a:p>
             <a:pPr lvl="4"/>
             <a:r>
-              <a:rPr lang="en-US"/>
+              <a:rPr lang="en-GB"/>
               <a:t>Fifth level</a:t>
             </a:r>
-            <a:endParaRPr lang="en-IN"/>
-          </a:p>
-        </p:txBody>
-      </p:sp>
-      <p:sp>
-        <p:nvSpPr>
-          <p:cNvPr id="5" name="Date Placeholder 4">
-            <a:extLst>
-              <a:ext uri="{FF2B5EF4-FFF2-40B4-BE49-F238E27FC236}">
-                <a16:creationId xmlns:a16="http://schemas.microsoft.com/office/drawing/2014/main" id="{59C9FCE3-9F34-8490-0562-BBD45645632F}"/>
-              </a:ext>
-            </a:extLst>
-          </p:cNvPr>
+            <a:endParaRPr lang="en-US" dirty="0"/>
+          </a:p>
+        </p:txBody>
+      </p:sp>
+      <p:sp>
+        <p:nvSpPr>
+          <p:cNvPr id="8" name="Date Placeholder 7"/>
           <p:cNvSpPr>
             <a:spLocks noGrp="1"/>
           </p:cNvSpPr>
@@ -1653,7 +1640,7 @@
           <a:p>
             <a:fld id="{3E594C3D-A39B-4310-B7FD-B60219990675}" type="datetimeFigureOut">
               <a:rPr lang="en-IN" smtClean="0"/>
-              <a:t>27-08-2026</a:t>
+              <a:t>28-08-2026</a:t>
             </a:fld>
             <a:endParaRPr lang="en-IN"/>
           </a:p>
@@ -1661,13 +1648,7 @@
       </p:sp>
       <p:sp>
         <p:nvSpPr>
-          <p:cNvPr id="6" name="Footer Placeholder 5">
-            <a:extLst>
-              <a:ext uri="{FF2B5EF4-FFF2-40B4-BE49-F238E27FC236}">
-                <a16:creationId xmlns:a16="http://schemas.microsoft.com/office/drawing/2014/main" id="{53FA7712-3B82-FEFC-9AD4-12A13E87CA49}"/>
-              </a:ext>
-            </a:extLst>
-          </p:cNvPr>
+          <p:cNvPr id="9" name="Footer Placeholder 8"/>
           <p:cNvSpPr>
             <a:spLocks noGrp="1"/>
           </p:cNvSpPr>
@@ -1686,13 +1667,7 @@
       </p:sp>
       <p:sp>
         <p:nvSpPr>
-          <p:cNvPr id="7" name="Slide Number Placeholder 6">
-            <a:extLst>
-              <a:ext uri="{FF2B5EF4-FFF2-40B4-BE49-F238E27FC236}">
-                <a16:creationId xmlns:a16="http://schemas.microsoft.com/office/drawing/2014/main" id="{B116D4AD-1436-C8AE-EF34-391FDA17EEC0}"/>
-              </a:ext>
-            </a:extLst>
-          </p:cNvPr>
+          <p:cNvPr id="10" name="Slide Number Placeholder 9"/>
           <p:cNvSpPr>
             <a:spLocks noGrp="1"/>
           </p:cNvSpPr>
@@ -1716,7 +1691,7 @@
     </p:spTree>
     <p:extLst>
       <p:ext uri="{BB962C8B-B14F-4D97-AF65-F5344CB8AC3E}">
-        <p14:creationId xmlns:p14="http://schemas.microsoft.com/office/powerpoint/2010/main" val="1650011454"/>
+        <p14:creationId xmlns:p14="http://schemas.microsoft.com/office/powerpoint/2010/main" val="729179310"/>
       </p:ext>
     </p:extLst>
   </p:cSld>
@@ -1745,66 +1720,61 @@
       </p:grpSpPr>
       <p:sp>
         <p:nvSpPr>
-          <p:cNvPr id="2" name="Title 1">
-            <a:extLst>
-              <a:ext uri="{FF2B5EF4-FFF2-40B4-BE49-F238E27FC236}">
-                <a16:creationId xmlns:a16="http://schemas.microsoft.com/office/drawing/2014/main" id="{0079FC44-B395-C9E7-A451-B02BCD5683FF}"/>
-              </a:ext>
-            </a:extLst>
-          </p:cNvPr>
+          <p:cNvPr id="10" name="Title 9"/>
           <p:cNvSpPr>
             <a:spLocks noGrp="1"/>
           </p:cNvSpPr>
           <p:nvPr>
             <p:ph type="title"/>
+          </p:nvPr>
+        </p:nvSpPr>
+        <p:spPr/>
+        <p:txBody>
+          <a:bodyPr/>
+          <a:lstStyle/>
+          <a:p>
+            <a:r>
+              <a:rPr lang="en-GB"/>
+              <a:t>Click to edit Master title style</a:t>
+            </a:r>
+            <a:endParaRPr lang="en-US" dirty="0"/>
+          </a:p>
+        </p:txBody>
+      </p:sp>
+      <p:sp>
+        <p:nvSpPr>
+          <p:cNvPr id="3" name="Text Placeholder 2"/>
+          <p:cNvSpPr>
+            <a:spLocks noGrp="1"/>
+          </p:cNvSpPr>
+          <p:nvPr>
+            <p:ph type="body" idx="1"/>
           </p:nvPr>
         </p:nvSpPr>
         <p:spPr>
           <a:xfrm>
-            <a:off x="839788" y="365125"/>
-            <a:ext cx="10515600" cy="1325563"/>
+            <a:off x="3867912" y="1023586"/>
+            <a:ext cx="3474720" cy="807720"/>
           </a:xfrm>
         </p:spPr>
         <p:txBody>
-          <a:bodyPr/>
-          <a:lstStyle/>
-          <a:p>
-            <a:r>
-              <a:rPr lang="en-US"/>
-              <a:t>Click to edit Master title style</a:t>
-            </a:r>
-            <a:endParaRPr lang="en-IN"/>
-          </a:p>
-        </p:txBody>
-      </p:sp>
-      <p:sp>
-        <p:nvSpPr>
-          <p:cNvPr id="3" name="Text Placeholder 2">
-            <a:extLst>
-              <a:ext uri="{FF2B5EF4-FFF2-40B4-BE49-F238E27FC236}">
-                <a16:creationId xmlns:a16="http://schemas.microsoft.com/office/drawing/2014/main" id="{6669FAC9-89B4-B982-3E85-4E6C1752F5BD}"/>
-              </a:ext>
-            </a:extLst>
-          </p:cNvPr>
-          <p:cNvSpPr>
-            <a:spLocks noGrp="1"/>
-          </p:cNvSpPr>
-          <p:nvPr>
-            <p:ph type="body" idx="1"/>
-          </p:nvPr>
-        </p:nvSpPr>
-        <p:spPr>
-          <a:xfrm>
-            <a:off x="839788" y="1681163"/>
-            <a:ext cx="5157787" cy="823912"/>
-          </a:xfrm>
-        </p:spPr>
-        <p:txBody>
-          <a:bodyPr anchor="b"/>
+          <a:bodyPr anchor="b">
+            <a:normAutofit/>
+          </a:bodyPr>
           <a:lstStyle>
             <a:lvl1pPr marL="0" indent="0">
-              <a:buNone/>
-              <a:defRPr sz="2400" b="1"/>
+              <a:spcBef>
+                <a:spcPts val="0"/>
+              </a:spcBef>
+              <a:buNone/>
+              <a:defRPr sz="2000" b="1">
+                <a:solidFill>
+                  <a:schemeClr val="tx1">
+                    <a:lumMod val="65000"/>
+                    <a:lumOff val="35000"/>
+                  </a:schemeClr>
+                </a:solidFill>
+              </a:defRPr>
             </a:lvl1pPr>
             <a:lvl2pPr marL="457200" indent="0">
               <a:buNone/>
@@ -1842,7 +1812,7 @@
           <a:p>
             <a:pPr lvl="0"/>
             <a:r>
-              <a:rPr lang="en-US"/>
+              <a:rPr lang="en-GB"/>
               <a:t>Click to edit Master text styles</a:t>
             </a:r>
           </a:p>
@@ -1850,13 +1820,7 @@
       </p:sp>
       <p:sp>
         <p:nvSpPr>
-          <p:cNvPr id="4" name="Content Placeholder 3">
-            <a:extLst>
-              <a:ext uri="{FF2B5EF4-FFF2-40B4-BE49-F238E27FC236}">
-                <a16:creationId xmlns:a16="http://schemas.microsoft.com/office/drawing/2014/main" id="{FD02554D-46BF-6085-50E9-F6E8B6305328}"/>
-              </a:ext>
-            </a:extLst>
-          </p:cNvPr>
+          <p:cNvPr id="4" name="Content Placeholder 3"/>
           <p:cNvSpPr>
             <a:spLocks noGrp="1"/>
           </p:cNvSpPr>
@@ -1866,60 +1830,82 @@
         </p:nvSpPr>
         <p:spPr>
           <a:xfrm>
-            <a:off x="839788" y="2505075"/>
-            <a:ext cx="5157787" cy="3684588"/>
+            <a:off x="3867912" y="1930936"/>
+            <a:ext cx="3474720" cy="4023360"/>
           </a:xfrm>
         </p:spPr>
         <p:txBody>
           <a:bodyPr/>
-          <a:lstStyle/>
+          <a:lstStyle>
+            <a:lvl1pPr>
+              <a:defRPr sz="2000"/>
+            </a:lvl1pPr>
+            <a:lvl2pPr>
+              <a:defRPr sz="1800"/>
+            </a:lvl2pPr>
+            <a:lvl3pPr>
+              <a:defRPr sz="1600"/>
+            </a:lvl3pPr>
+            <a:lvl4pPr>
+              <a:defRPr sz="1400"/>
+            </a:lvl4pPr>
+            <a:lvl5pPr>
+              <a:defRPr sz="1400"/>
+            </a:lvl5pPr>
+            <a:lvl6pPr>
+              <a:defRPr sz="1400"/>
+            </a:lvl6pPr>
+            <a:lvl7pPr>
+              <a:defRPr sz="1400"/>
+            </a:lvl7pPr>
+            <a:lvl8pPr>
+              <a:defRPr sz="1400"/>
+            </a:lvl8pPr>
+            <a:lvl9pPr>
+              <a:defRPr sz="1400"/>
+            </a:lvl9pPr>
+          </a:lstStyle>
           <a:p>
             <a:pPr lvl="0"/>
             <a:r>
-              <a:rPr lang="en-US"/>
+              <a:rPr lang="en-GB"/>
               <a:t>Click to edit Master text styles</a:t>
             </a:r>
           </a:p>
           <a:p>
             <a:pPr lvl="1"/>
             <a:r>
-              <a:rPr lang="en-US"/>
+              <a:rPr lang="en-GB"/>
               <a:t>Second level</a:t>
             </a:r>
           </a:p>
           <a:p>
             <a:pPr lvl="2"/>
             <a:r>
-              <a:rPr lang="en-US"/>
+              <a:rPr lang="en-GB"/>
               <a:t>Third level</a:t>
             </a:r>
           </a:p>
           <a:p>
             <a:pPr lvl="3"/>
             <a:r>
-              <a:rPr lang="en-US"/>
+              <a:rPr lang="en-GB"/>
               <a:t>Fourth level</a:t>
             </a:r>
           </a:p>
           <a:p>
             <a:pPr lvl="4"/>
             <a:r>
-              <a:rPr lang="en-US"/>
+              <a:rPr lang="en-GB"/>
               <a:t>Fifth level</a:t>
             </a:r>
-            <a:endParaRPr lang="en-IN"/>
-          </a:p>
-        </p:txBody>
-      </p:sp>
-      <p:sp>
-        <p:nvSpPr>
-          <p:cNvPr id="5" name="Text Placeholder 4">
-            <a:extLst>
-              <a:ext uri="{FF2B5EF4-FFF2-40B4-BE49-F238E27FC236}">
-                <a16:creationId xmlns:a16="http://schemas.microsoft.com/office/drawing/2014/main" id="{37642469-8127-F978-A7BA-19CE8DE285BB}"/>
-              </a:ext>
-            </a:extLst>
-          </p:cNvPr>
+            <a:endParaRPr lang="en-US" dirty="0"/>
+          </a:p>
+        </p:txBody>
+      </p:sp>
+      <p:sp>
+        <p:nvSpPr>
+          <p:cNvPr id="5" name="Text Placeholder 4"/>
           <p:cNvSpPr>
             <a:spLocks noGrp="1"/>
           </p:cNvSpPr>
@@ -1929,16 +1915,28 @@
         </p:nvSpPr>
         <p:spPr>
           <a:xfrm>
-            <a:off x="6172200" y="1681163"/>
-            <a:ext cx="5183188" cy="823912"/>
+            <a:off x="7818463" y="1023586"/>
+            <a:ext cx="3474720" cy="813171"/>
           </a:xfrm>
         </p:spPr>
         <p:txBody>
-          <a:bodyPr anchor="b"/>
+          <a:bodyPr anchor="b">
+            <a:normAutofit/>
+          </a:bodyPr>
           <a:lstStyle>
             <a:lvl1pPr marL="0" indent="0">
-              <a:buNone/>
-              <a:defRPr sz="2400" b="1"/>
+              <a:spcBef>
+                <a:spcPts val="0"/>
+              </a:spcBef>
+              <a:buNone/>
+              <a:defRPr sz="2000" b="1">
+                <a:solidFill>
+                  <a:schemeClr val="tx1">
+                    <a:lumMod val="65000"/>
+                    <a:lumOff val="35000"/>
+                  </a:schemeClr>
+                </a:solidFill>
+              </a:defRPr>
             </a:lvl1pPr>
             <a:lvl2pPr marL="457200" indent="0">
               <a:buNone/>
@@ -1976,7 +1974,7 @@
           <a:p>
             <a:pPr lvl="0"/>
             <a:r>
-              <a:rPr lang="en-US"/>
+              <a:rPr lang="en-GB"/>
               <a:t>Click to edit Master text styles</a:t>
             </a:r>
           </a:p>
@@ -1984,13 +1982,7 @@
       </p:sp>
       <p:sp>
         <p:nvSpPr>
-          <p:cNvPr id="6" name="Content Placeholder 5">
-            <a:extLst>
-              <a:ext uri="{FF2B5EF4-FFF2-40B4-BE49-F238E27FC236}">
-                <a16:creationId xmlns:a16="http://schemas.microsoft.com/office/drawing/2014/main" id="{106BA8E7-BCCD-3620-8A87-B96A48BA7B8B}"/>
-              </a:ext>
-            </a:extLst>
-          </p:cNvPr>
+          <p:cNvPr id="6" name="Content Placeholder 5"/>
           <p:cNvSpPr>
             <a:spLocks noGrp="1"/>
           </p:cNvSpPr>
@@ -2000,60 +1992,82 @@
         </p:nvSpPr>
         <p:spPr>
           <a:xfrm>
-            <a:off x="6172200" y="2505075"/>
-            <a:ext cx="5183188" cy="3684588"/>
+            <a:off x="7818463" y="1930936"/>
+            <a:ext cx="3474720" cy="4023360"/>
           </a:xfrm>
         </p:spPr>
         <p:txBody>
           <a:bodyPr/>
-          <a:lstStyle/>
+          <a:lstStyle>
+            <a:lvl1pPr>
+              <a:defRPr sz="2000"/>
+            </a:lvl1pPr>
+            <a:lvl2pPr>
+              <a:defRPr sz="1800"/>
+            </a:lvl2pPr>
+            <a:lvl3pPr>
+              <a:defRPr sz="1600"/>
+            </a:lvl3pPr>
+            <a:lvl4pPr>
+              <a:defRPr sz="1400"/>
+            </a:lvl4pPr>
+            <a:lvl5pPr>
+              <a:defRPr sz="1400"/>
+            </a:lvl5pPr>
+            <a:lvl6pPr>
+              <a:defRPr sz="1400"/>
+            </a:lvl6pPr>
+            <a:lvl7pPr>
+              <a:defRPr sz="1400"/>
+            </a:lvl7pPr>
+            <a:lvl8pPr>
+              <a:defRPr sz="1400"/>
+            </a:lvl8pPr>
+            <a:lvl9pPr>
+              <a:defRPr sz="1400"/>
+            </a:lvl9pPr>
+          </a:lstStyle>
           <a:p>
             <a:pPr lvl="0"/>
             <a:r>
-              <a:rPr lang="en-US"/>
+              <a:rPr lang="en-GB"/>
               <a:t>Click to edit Master text styles</a:t>
             </a:r>
           </a:p>
           <a:p>
             <a:pPr lvl="1"/>
             <a:r>
-              <a:rPr lang="en-US"/>
+              <a:rPr lang="en-GB"/>
               <a:t>Second level</a:t>
             </a:r>
           </a:p>
           <a:p>
             <a:pPr lvl="2"/>
             <a:r>
-              <a:rPr lang="en-US"/>
+              <a:rPr lang="en-GB"/>
               <a:t>Third level</a:t>
             </a:r>
           </a:p>
           <a:p>
             <a:pPr lvl="3"/>
             <a:r>
-              <a:rPr lang="en-US"/>
+              <a:rPr lang="en-GB"/>
               <a:t>Fourth level</a:t>
             </a:r>
           </a:p>
           <a:p>
             <a:pPr lvl="4"/>
             <a:r>
-              <a:rPr lang="en-US"/>
+              <a:rPr lang="en-GB"/>
               <a:t>Fifth level</a:t>
             </a:r>
-            <a:endParaRPr lang="en-IN"/>
-          </a:p>
-        </p:txBody>
-      </p:sp>
-      <p:sp>
-        <p:nvSpPr>
-          <p:cNvPr id="7" name="Date Placeholder 6">
-            <a:extLst>
-              <a:ext uri="{FF2B5EF4-FFF2-40B4-BE49-F238E27FC236}">
-                <a16:creationId xmlns:a16="http://schemas.microsoft.com/office/drawing/2014/main" id="{B62D2361-A7CB-DC24-659E-B9E6BB5AFC43}"/>
-              </a:ext>
-            </a:extLst>
-          </p:cNvPr>
+            <a:endParaRPr lang="en-US" dirty="0"/>
+          </a:p>
+        </p:txBody>
+      </p:sp>
+      <p:sp>
+        <p:nvSpPr>
+          <p:cNvPr id="2" name="Date Placeholder 1"/>
           <p:cNvSpPr>
             <a:spLocks noGrp="1"/>
           </p:cNvSpPr>
@@ -2068,7 +2082,7 @@
           <a:p>
             <a:fld id="{3E594C3D-A39B-4310-B7FD-B60219990675}" type="datetimeFigureOut">
               <a:rPr lang="en-IN" smtClean="0"/>
-              <a:t>27-08-2026</a:t>
+              <a:t>28-08-2026</a:t>
             </a:fld>
             <a:endParaRPr lang="en-IN"/>
           </a:p>
@@ -2076,13 +2090,7 @@
       </p:sp>
       <p:sp>
         <p:nvSpPr>
-          <p:cNvPr id="8" name="Footer Placeholder 7">
-            <a:extLst>
-              <a:ext uri="{FF2B5EF4-FFF2-40B4-BE49-F238E27FC236}">
-                <a16:creationId xmlns:a16="http://schemas.microsoft.com/office/drawing/2014/main" id="{B1426E81-228A-AA10-7D00-D8CC1E596318}"/>
-              </a:ext>
-            </a:extLst>
-          </p:cNvPr>
+          <p:cNvPr id="11" name="Footer Placeholder 10"/>
           <p:cNvSpPr>
             <a:spLocks noGrp="1"/>
           </p:cNvSpPr>
@@ -2101,13 +2109,7 @@
       </p:sp>
       <p:sp>
         <p:nvSpPr>
-          <p:cNvPr id="9" name="Slide Number Placeholder 8">
-            <a:extLst>
-              <a:ext uri="{FF2B5EF4-FFF2-40B4-BE49-F238E27FC236}">
-                <a16:creationId xmlns:a16="http://schemas.microsoft.com/office/drawing/2014/main" id="{57D7F024-B1C3-A168-09A0-57B06D25C58B}"/>
-              </a:ext>
-            </a:extLst>
-          </p:cNvPr>
+          <p:cNvPr id="12" name="Slide Number Placeholder 11"/>
           <p:cNvSpPr>
             <a:spLocks noGrp="1"/>
           </p:cNvSpPr>
@@ -2131,7 +2133,7 @@
     </p:spTree>
     <p:extLst>
       <p:ext uri="{BB962C8B-B14F-4D97-AF65-F5344CB8AC3E}">
-        <p14:creationId xmlns:p14="http://schemas.microsoft.com/office/powerpoint/2010/main" val="2680613869"/>
+        <p14:creationId xmlns:p14="http://schemas.microsoft.com/office/powerpoint/2010/main" val="2160527553"/>
       </p:ext>
     </p:extLst>
   </p:cSld>
@@ -2160,13 +2162,7 @@
       </p:grpSpPr>
       <p:sp>
         <p:nvSpPr>
-          <p:cNvPr id="2" name="Title 1">
-            <a:extLst>
-              <a:ext uri="{FF2B5EF4-FFF2-40B4-BE49-F238E27FC236}">
-                <a16:creationId xmlns:a16="http://schemas.microsoft.com/office/drawing/2014/main" id="{D2217CC1-8BF6-F428-D7F4-81328BBA0DF0}"/>
-              </a:ext>
-            </a:extLst>
-          </p:cNvPr>
+          <p:cNvPr id="6" name="Title 5"/>
           <p:cNvSpPr>
             <a:spLocks noGrp="1"/>
           </p:cNvSpPr>
@@ -2180,22 +2176,16 @@
           <a:lstStyle/>
           <a:p>
             <a:r>
-              <a:rPr lang="en-US"/>
+              <a:rPr lang="en-GB"/>
               <a:t>Click to edit Master title style</a:t>
             </a:r>
-            <a:endParaRPr lang="en-IN"/>
-          </a:p>
-        </p:txBody>
-      </p:sp>
-      <p:sp>
-        <p:nvSpPr>
-          <p:cNvPr id="3" name="Date Placeholder 2">
-            <a:extLst>
-              <a:ext uri="{FF2B5EF4-FFF2-40B4-BE49-F238E27FC236}">
-                <a16:creationId xmlns:a16="http://schemas.microsoft.com/office/drawing/2014/main" id="{4F6482A0-76FF-A405-A2DD-775AE2615E8D}"/>
-              </a:ext>
-            </a:extLst>
-          </p:cNvPr>
+            <a:endParaRPr lang="en-US" dirty="0"/>
+          </a:p>
+        </p:txBody>
+      </p:sp>
+      <p:sp>
+        <p:nvSpPr>
+          <p:cNvPr id="2" name="Date Placeholder 1"/>
           <p:cNvSpPr>
             <a:spLocks noGrp="1"/>
           </p:cNvSpPr>
@@ -2210,7 +2200,7 @@
           <a:p>
             <a:fld id="{3E594C3D-A39B-4310-B7FD-B60219990675}" type="datetimeFigureOut">
               <a:rPr lang="en-IN" smtClean="0"/>
-              <a:t>27-08-2026</a:t>
+              <a:t>28-08-2026</a:t>
             </a:fld>
             <a:endParaRPr lang="en-IN"/>
           </a:p>
@@ -2218,13 +2208,7 @@
       </p:sp>
       <p:sp>
         <p:nvSpPr>
-          <p:cNvPr id="4" name="Footer Placeholder 3">
-            <a:extLst>
-              <a:ext uri="{FF2B5EF4-FFF2-40B4-BE49-F238E27FC236}">
-                <a16:creationId xmlns:a16="http://schemas.microsoft.com/office/drawing/2014/main" id="{4D2BB294-7899-12B2-E431-AA4820676025}"/>
-              </a:ext>
-            </a:extLst>
-          </p:cNvPr>
+          <p:cNvPr id="7" name="Footer Placeholder 6"/>
           <p:cNvSpPr>
             <a:spLocks noGrp="1"/>
           </p:cNvSpPr>
@@ -2243,13 +2227,7 @@
       </p:sp>
       <p:sp>
         <p:nvSpPr>
-          <p:cNvPr id="5" name="Slide Number Placeholder 4">
-            <a:extLst>
-              <a:ext uri="{FF2B5EF4-FFF2-40B4-BE49-F238E27FC236}">
-                <a16:creationId xmlns:a16="http://schemas.microsoft.com/office/drawing/2014/main" id="{ECF64A07-404E-8C7F-9D43-1BFCE179ECE4}"/>
-              </a:ext>
-            </a:extLst>
-          </p:cNvPr>
+          <p:cNvPr id="8" name="Slide Number Placeholder 7"/>
           <p:cNvSpPr>
             <a:spLocks noGrp="1"/>
           </p:cNvSpPr>
@@ -2273,7 +2251,7 @@
     </p:spTree>
     <p:extLst>
       <p:ext uri="{BB962C8B-B14F-4D97-AF65-F5344CB8AC3E}">
-        <p14:creationId xmlns:p14="http://schemas.microsoft.com/office/powerpoint/2010/main" val="1716736134"/>
+        <p14:creationId xmlns:p14="http://schemas.microsoft.com/office/powerpoint/2010/main" val="1408158872"/>
       </p:ext>
     </p:extLst>
   </p:cSld>
@@ -2284,7 +2262,7 @@
 </file>
 
 <file path=ppt/slideLayouts/slideLayout7.xml><?xml version="1.0" encoding="utf-8"?>
-<p:sldLayout xmlns:a="http://schemas.openxmlformats.org/drawingml/2006/main" xmlns:r="http://schemas.openxmlformats.org/officeDocument/2006/relationships" xmlns:p="http://schemas.openxmlformats.org/presentationml/2006/main" type="blank" preserve="1">
+<p:sldLayout xmlns:a="http://schemas.openxmlformats.org/drawingml/2006/main" xmlns:r="http://schemas.openxmlformats.org/officeDocument/2006/relationships" xmlns:p="http://schemas.openxmlformats.org/presentationml/2006/main" showMasterSp="0" type="blank" preserve="1">
   <p:cSld name="Blank">
     <p:spTree>
       <p:nvGrpSpPr>
@@ -2302,13 +2280,7 @@
       </p:grpSpPr>
       <p:sp>
         <p:nvSpPr>
-          <p:cNvPr id="2" name="Date Placeholder 1">
-            <a:extLst>
-              <a:ext uri="{FF2B5EF4-FFF2-40B4-BE49-F238E27FC236}">
-                <a16:creationId xmlns:a16="http://schemas.microsoft.com/office/drawing/2014/main" id="{2A50ED40-3DD0-2F0F-AE28-BCBF0BAA9AF6}"/>
-              </a:ext>
-            </a:extLst>
-          </p:cNvPr>
+          <p:cNvPr id="5" name="Date Placeholder 4"/>
           <p:cNvSpPr>
             <a:spLocks noGrp="1"/>
           </p:cNvSpPr>
@@ -2323,7 +2295,7 @@
           <a:p>
             <a:fld id="{3E594C3D-A39B-4310-B7FD-B60219990675}" type="datetimeFigureOut">
               <a:rPr lang="en-IN" smtClean="0"/>
-              <a:t>27-08-2026</a:t>
+              <a:t>28-08-2026</a:t>
             </a:fld>
             <a:endParaRPr lang="en-IN"/>
           </a:p>
@@ -2331,13 +2303,7 @@
       </p:sp>
       <p:sp>
         <p:nvSpPr>
-          <p:cNvPr id="3" name="Footer Placeholder 2">
-            <a:extLst>
-              <a:ext uri="{FF2B5EF4-FFF2-40B4-BE49-F238E27FC236}">
-                <a16:creationId xmlns:a16="http://schemas.microsoft.com/office/drawing/2014/main" id="{6F8DF096-0445-9C1D-9C48-AEB7371467BF}"/>
-              </a:ext>
-            </a:extLst>
-          </p:cNvPr>
+          <p:cNvPr id="6" name="Footer Placeholder 5"/>
           <p:cNvSpPr>
             <a:spLocks noGrp="1"/>
           </p:cNvSpPr>
@@ -2356,13 +2322,7 @@
       </p:sp>
       <p:sp>
         <p:nvSpPr>
-          <p:cNvPr id="4" name="Slide Number Placeholder 3">
-            <a:extLst>
-              <a:ext uri="{FF2B5EF4-FFF2-40B4-BE49-F238E27FC236}">
-                <a16:creationId xmlns:a16="http://schemas.microsoft.com/office/drawing/2014/main" id="{856A25A4-04A2-F178-ED77-0C57B74C64FE}"/>
-              </a:ext>
-            </a:extLst>
-          </p:cNvPr>
+          <p:cNvPr id="7" name="Slide Number Placeholder 6"/>
           <p:cNvSpPr>
             <a:spLocks noGrp="1"/>
           </p:cNvSpPr>
@@ -2386,7 +2346,7 @@
     </p:spTree>
     <p:extLst>
       <p:ext uri="{BB962C8B-B14F-4D97-AF65-F5344CB8AC3E}">
-        <p14:creationId xmlns:p14="http://schemas.microsoft.com/office/powerpoint/2010/main" val="2599251562"/>
+        <p14:creationId xmlns:p14="http://schemas.microsoft.com/office/powerpoint/2010/main" val="1764682700"/>
       </p:ext>
     </p:extLst>
   </p:cSld>
@@ -2415,13 +2375,7 @@
       </p:grpSpPr>
       <p:sp>
         <p:nvSpPr>
-          <p:cNvPr id="2" name="Title 1">
-            <a:extLst>
-              <a:ext uri="{FF2B5EF4-FFF2-40B4-BE49-F238E27FC236}">
-                <a16:creationId xmlns:a16="http://schemas.microsoft.com/office/drawing/2014/main" id="{9A49B528-A107-7F95-6CC1-53A1B19DE95A}"/>
-              </a:ext>
-            </a:extLst>
-          </p:cNvPr>
+          <p:cNvPr id="2" name="Title 1"/>
           <p:cNvSpPr>
             <a:spLocks noGrp="1"/>
           </p:cNvSpPr>
@@ -2431,35 +2385,31 @@
         </p:nvSpPr>
         <p:spPr>
           <a:xfrm>
-            <a:off x="839788" y="457200"/>
-            <a:ext cx="3932237" cy="1600200"/>
+            <a:off x="256032" y="1143000"/>
+            <a:ext cx="2834640" cy="2377440"/>
           </a:xfrm>
         </p:spPr>
         <p:txBody>
-          <a:bodyPr anchor="b"/>
+          <a:bodyPr anchor="b">
+            <a:normAutofit/>
+          </a:bodyPr>
           <a:lstStyle>
             <a:lvl1pPr>
-              <a:defRPr sz="3200"/>
+              <a:defRPr sz="3200" b="0" baseline="0"/>
             </a:lvl1pPr>
           </a:lstStyle>
           <a:p>
             <a:r>
-              <a:rPr lang="en-US"/>
+              <a:rPr lang="en-GB"/>
               <a:t>Click to edit Master title style</a:t>
             </a:r>
-            <a:endParaRPr lang="en-IN"/>
-          </a:p>
-        </p:txBody>
-      </p:sp>
-      <p:sp>
-        <p:nvSpPr>
-          <p:cNvPr id="3" name="Content Placeholder 2">
-            <a:extLst>
-              <a:ext uri="{FF2B5EF4-FFF2-40B4-BE49-F238E27FC236}">
-                <a16:creationId xmlns:a16="http://schemas.microsoft.com/office/drawing/2014/main" id="{B62AB4A8-8083-9103-9F31-AFBD4991DABE}"/>
-              </a:ext>
-            </a:extLst>
-          </p:cNvPr>
+            <a:endParaRPr lang="en-US" dirty="0"/>
+          </a:p>
+        </p:txBody>
+      </p:sp>
+      <p:sp>
+        <p:nvSpPr>
+          <p:cNvPr id="3" name="Content Placeholder 2"/>
           <p:cNvSpPr>
             <a:spLocks noGrp="1"/>
           </p:cNvSpPr>
@@ -2469,88 +2419,82 @@
         </p:nvSpPr>
         <p:spPr>
           <a:xfrm>
-            <a:off x="5183188" y="987425"/>
-            <a:ext cx="6172200" cy="4873625"/>
+            <a:off x="3867912" y="868680"/>
+            <a:ext cx="7315200" cy="5120640"/>
           </a:xfrm>
         </p:spPr>
         <p:txBody>
           <a:bodyPr/>
           <a:lstStyle>
             <a:lvl1pPr>
-              <a:defRPr sz="3200"/>
+              <a:defRPr sz="2000"/>
             </a:lvl1pPr>
             <a:lvl2pPr>
-              <a:defRPr sz="2800"/>
+              <a:defRPr sz="1800"/>
             </a:lvl2pPr>
             <a:lvl3pPr>
-              <a:defRPr sz="2400"/>
+              <a:defRPr sz="1600"/>
             </a:lvl3pPr>
             <a:lvl4pPr>
-              <a:defRPr sz="2000"/>
+              <a:defRPr sz="1400"/>
             </a:lvl4pPr>
             <a:lvl5pPr>
-              <a:defRPr sz="2000"/>
+              <a:defRPr sz="1400"/>
             </a:lvl5pPr>
             <a:lvl6pPr>
-              <a:defRPr sz="2000"/>
+              <a:defRPr sz="1400"/>
             </a:lvl6pPr>
             <a:lvl7pPr>
-              <a:defRPr sz="2000"/>
+              <a:defRPr sz="1400"/>
             </a:lvl7pPr>
             <a:lvl8pPr>
-              <a:defRPr sz="2000"/>
+              <a:defRPr sz="1400"/>
             </a:lvl8pPr>
             <a:lvl9pPr>
-              <a:defRPr sz="2000"/>
+              <a:defRPr sz="1400"/>
             </a:lvl9pPr>
           </a:lstStyle>
           <a:p>
             <a:pPr lvl="0"/>
             <a:r>
-              <a:rPr lang="en-US"/>
+              <a:rPr lang="en-GB"/>
               <a:t>Click to edit Master text styles</a:t>
             </a:r>
           </a:p>
           <a:p>
             <a:pPr lvl="1"/>
             <a:r>
-              <a:rPr lang="en-US"/>
+              <a:rPr lang="en-GB"/>
               <a:t>Second level</a:t>
             </a:r>
           </a:p>
           <a:p>
             <a:pPr lvl="2"/>
             <a:r>
-              <a:rPr lang="en-US"/>
+              <a:rPr lang="en-GB"/>
               <a:t>Third level</a:t>
             </a:r>
           </a:p>
           <a:p>
             <a:pPr lvl="3"/>
             <a:r>
-              <a:rPr lang="en-US"/>
+              <a:rPr lang="en-GB"/>
               <a:t>Fourth level</a:t>
             </a:r>
           </a:p>
           <a:p>
             <a:pPr lvl="4"/>
             <a:r>
-              <a:rPr lang="en-US"/>
+              <a:rPr lang="en-GB"/>
               <a:t>Fifth level</a:t>
             </a:r>
-            <a:endParaRPr lang="en-IN"/>
-          </a:p>
-        </p:txBody>
-      </p:sp>
-      <p:sp>
-        <p:nvSpPr>
-          <p:cNvPr id="4" name="Text Placeholder 3">
-            <a:extLst>
-              <a:ext uri="{FF2B5EF4-FFF2-40B4-BE49-F238E27FC236}">
-                <a16:creationId xmlns:a16="http://schemas.microsoft.com/office/drawing/2014/main" id="{544456B9-8CF8-AC6D-DBE0-9D1889B290AD}"/>
-              </a:ext>
-            </a:extLst>
-          </p:cNvPr>
+            <a:endParaRPr lang="en-US" dirty="0"/>
+          </a:p>
+        </p:txBody>
+      </p:sp>
+      <p:sp>
+        <p:nvSpPr>
+          <p:cNvPr id="4" name="Text Placeholder 3"/>
           <p:cNvSpPr>
             <a:spLocks noGrp="1"/>
           </p:cNvSpPr>
@@ -2560,54 +2504,63 @@
         </p:nvSpPr>
         <p:spPr>
           <a:xfrm>
-            <a:off x="839788" y="2057400"/>
-            <a:ext cx="3932237" cy="3811588"/>
+            <a:off x="256032" y="3494176"/>
+            <a:ext cx="2834640" cy="2321990"/>
           </a:xfrm>
         </p:spPr>
         <p:txBody>
-          <a:bodyPr/>
+          <a:bodyPr anchor="t">
+            <a:normAutofit/>
+          </a:bodyPr>
           <a:lstStyle>
             <a:lvl1pPr marL="0" indent="0">
-              <a:buNone/>
-              <a:defRPr sz="1600"/>
+              <a:lnSpc>
+                <a:spcPct val="100000"/>
+              </a:lnSpc>
+              <a:buNone/>
+              <a:defRPr sz="1400">
+                <a:solidFill>
+                  <a:srgbClr val="FFFFFF"/>
+                </a:solidFill>
+              </a:defRPr>
             </a:lvl1pPr>
             <a:lvl2pPr marL="457200" indent="0">
               <a:buNone/>
-              <a:defRPr sz="1400"/>
+              <a:defRPr sz="1200"/>
             </a:lvl2pPr>
             <a:lvl3pPr marL="914400" indent="0">
               <a:buNone/>
-              <a:defRPr sz="1200"/>
+              <a:defRPr sz="1000"/>
             </a:lvl3pPr>
             <a:lvl4pPr marL="1371600" indent="0">
               <a:buNone/>
-              <a:defRPr sz="1000"/>
+              <a:defRPr sz="900"/>
             </a:lvl4pPr>
             <a:lvl5pPr marL="1828800" indent="0">
               <a:buNone/>
-              <a:defRPr sz="1000"/>
+              <a:defRPr sz="900"/>
             </a:lvl5pPr>
             <a:lvl6pPr marL="2286000" indent="0">
               <a:buNone/>
-              <a:defRPr sz="1000"/>
+              <a:defRPr sz="900"/>
             </a:lvl6pPr>
             <a:lvl7pPr marL="2743200" indent="0">
               <a:buNone/>
-              <a:defRPr sz="1000"/>
+              <a:defRPr sz="900"/>
             </a:lvl7pPr>
             <a:lvl8pPr marL="3200400" indent="0">
               <a:buNone/>
-              <a:defRPr sz="1000"/>
+              <a:defRPr sz="900"/>
             </a:lvl8pPr>
             <a:lvl9pPr marL="3657600" indent="0">
               <a:buNone/>
-              <a:defRPr sz="1000"/>
+              <a:defRPr sz="900"/>
             </a:lvl9pPr>
           </a:lstStyle>
           <a:p>
             <a:pPr lvl="0"/>
             <a:r>
-              <a:rPr lang="en-US"/>
+              <a:rPr lang="en-GB"/>
               <a:t>Click to edit Master text styles</a:t>
             </a:r>
           </a:p>
@@ -2615,13 +2568,7 @@
       </p:sp>
       <p:sp>
         <p:nvSpPr>
-          <p:cNvPr id="5" name="Date Placeholder 4">
-            <a:extLst>
-              <a:ext uri="{FF2B5EF4-FFF2-40B4-BE49-F238E27FC236}">
-                <a16:creationId xmlns:a16="http://schemas.microsoft.com/office/drawing/2014/main" id="{E70A8388-439D-B0D7-6BA0-1072A90AF5B5}"/>
-              </a:ext>
-            </a:extLst>
-          </p:cNvPr>
+          <p:cNvPr id="8" name="Date Placeholder 7"/>
           <p:cNvSpPr>
             <a:spLocks noGrp="1"/>
           </p:cNvSpPr>
@@ -2636,7 +2583,7 @@
           <a:p>
             <a:fld id="{3E594C3D-A39B-4310-B7FD-B60219990675}" type="datetimeFigureOut">
               <a:rPr lang="en-IN" smtClean="0"/>
-              <a:t>27-08-2026</a:t>
+              <a:t>28-08-2026</a:t>
             </a:fld>
             <a:endParaRPr lang="en-IN"/>
           </a:p>
@@ -2644,13 +2591,7 @@
       </p:sp>
       <p:sp>
         <p:nvSpPr>
-          <p:cNvPr id="6" name="Footer Placeholder 5">
-            <a:extLst>
-              <a:ext uri="{FF2B5EF4-FFF2-40B4-BE49-F238E27FC236}">
-                <a16:creationId xmlns:a16="http://schemas.microsoft.com/office/drawing/2014/main" id="{66AE719E-CD3B-7DFC-65BE-392E2ED51868}"/>
-              </a:ext>
-            </a:extLst>
-          </p:cNvPr>
+          <p:cNvPr id="9" name="Footer Placeholder 8"/>
           <p:cNvSpPr>
             <a:spLocks noGrp="1"/>
           </p:cNvSpPr>
@@ -2669,13 +2610,7 @@
       </p:sp>
       <p:sp>
         <p:nvSpPr>
-          <p:cNvPr id="7" name="Slide Number Placeholder 6">
-            <a:extLst>
-              <a:ext uri="{FF2B5EF4-FFF2-40B4-BE49-F238E27FC236}">
-                <a16:creationId xmlns:a16="http://schemas.microsoft.com/office/drawing/2014/main" id="{342EC801-39D5-2BF7-618F-6F2B00F0A519}"/>
-              </a:ext>
-            </a:extLst>
-          </p:cNvPr>
+          <p:cNvPr id="10" name="Slide Number Placeholder 9"/>
           <p:cNvSpPr>
             <a:spLocks noGrp="1"/>
           </p:cNvSpPr>
@@ -2699,7 +2634,7 @@
     </p:spTree>
     <p:extLst>
       <p:ext uri="{BB962C8B-B14F-4D97-AF65-F5344CB8AC3E}">
-        <p14:creationId xmlns:p14="http://schemas.microsoft.com/office/powerpoint/2010/main" val="1816441262"/>
+        <p14:creationId xmlns:p14="http://schemas.microsoft.com/office/powerpoint/2010/main" val="2884150004"/>
       </p:ext>
     </p:extLst>
   </p:cSld>
@@ -2728,13 +2663,7 @@
       </p:grpSpPr>
       <p:sp>
         <p:nvSpPr>
-          <p:cNvPr id="2" name="Title 1">
-            <a:extLst>
-              <a:ext uri="{FF2B5EF4-FFF2-40B4-BE49-F238E27FC236}">
-                <a16:creationId xmlns:a16="http://schemas.microsoft.com/office/drawing/2014/main" id="{30604E77-EBDB-881F-5477-77ADB3400642}"/>
-              </a:ext>
-            </a:extLst>
-          </p:cNvPr>
+          <p:cNvPr id="2" name="Title 1"/>
           <p:cNvSpPr>
             <a:spLocks noGrp="1"/>
           </p:cNvSpPr>
@@ -2744,37 +2673,33 @@
         </p:nvSpPr>
         <p:spPr>
           <a:xfrm>
-            <a:off x="839788" y="457200"/>
-            <a:ext cx="3932237" cy="1600200"/>
+            <a:off x="256032" y="1143000"/>
+            <a:ext cx="2834640" cy="2377440"/>
           </a:xfrm>
         </p:spPr>
         <p:txBody>
-          <a:bodyPr anchor="b"/>
+          <a:bodyPr anchor="b">
+            <a:normAutofit/>
+          </a:bodyPr>
           <a:lstStyle>
             <a:lvl1pPr>
-              <a:defRPr sz="3200"/>
+              <a:defRPr sz="3200" b="0"/>
             </a:lvl1pPr>
           </a:lstStyle>
           <a:p>
             <a:r>
-              <a:rPr lang="en-US"/>
+              <a:rPr lang="en-GB"/>
               <a:t>Click to edit Master title style</a:t>
             </a:r>
-            <a:endParaRPr lang="en-IN"/>
-          </a:p>
-        </p:txBody>
-      </p:sp>
-      <p:sp>
-        <p:nvSpPr>
-          <p:cNvPr id="3" name="Picture Placeholder 2">
-            <a:extLst>
-              <a:ext uri="{FF2B5EF4-FFF2-40B4-BE49-F238E27FC236}">
-                <a16:creationId xmlns:a16="http://schemas.microsoft.com/office/drawing/2014/main" id="{5C3CD531-C627-080E-9F66-E402E11484AB}"/>
-              </a:ext>
-            </a:extLst>
-          </p:cNvPr>
-          <p:cNvSpPr>
-            <a:spLocks noGrp="1"/>
+            <a:endParaRPr lang="en-US" dirty="0"/>
+          </a:p>
+        </p:txBody>
+      </p:sp>
+      <p:sp>
+        <p:nvSpPr>
+          <p:cNvPr id="3" name="Picture Placeholder 2"/>
+          <p:cNvSpPr>
+            <a:spLocks noGrp="1" noChangeAspect="1"/>
           </p:cNvSpPr>
           <p:nvPr>
             <p:ph type="pic" idx="1"/>
@@ -2782,12 +2707,17 @@
         </p:nvSpPr>
         <p:spPr>
           <a:xfrm>
-            <a:off x="5183188" y="987425"/>
-            <a:ext cx="6172200" cy="4873625"/>
+            <a:off x="3570644" y="767419"/>
+            <a:ext cx="8115230" cy="5330952"/>
           </a:xfrm>
+          <a:solidFill>
+            <a:schemeClr val="bg1">
+              <a:lumMod val="75000"/>
+            </a:schemeClr>
+          </a:solidFill>
         </p:spPr>
         <p:txBody>
-          <a:bodyPr/>
+          <a:bodyPr anchor="t"/>
           <a:lstStyle>
             <a:lvl1pPr marL="0" indent="0">
               <a:buNone/>
@@ -2827,19 +2757,17 @@
             </a:lvl9pPr>
           </a:lstStyle>
           <a:p>
-            <a:endParaRPr lang="en-IN"/>
-          </a:p>
-        </p:txBody>
-      </p:sp>
-      <p:sp>
-        <p:nvSpPr>
-          <p:cNvPr id="4" name="Text Placeholder 3">
-            <a:extLst>
-              <a:ext uri="{FF2B5EF4-FFF2-40B4-BE49-F238E27FC236}">
-                <a16:creationId xmlns:a16="http://schemas.microsoft.com/office/drawing/2014/main" id="{1823B551-FFA7-A43D-1CDA-CDDEE13DA236}"/>
-              </a:ext>
-            </a:extLst>
-          </p:cNvPr>
+            <a:r>
+              <a:rPr lang="en-GB"/>
+              <a:t>Click icon to add picture</a:t>
+            </a:r>
+            <a:endParaRPr lang="en-US" dirty="0"/>
+          </a:p>
+        </p:txBody>
+      </p:sp>
+      <p:sp>
+        <p:nvSpPr>
+          <p:cNvPr id="4" name="Text Placeholder 3"/>
           <p:cNvSpPr>
             <a:spLocks noGrp="1"/>
           </p:cNvSpPr>
@@ -2849,54 +2777,63 @@
         </p:nvSpPr>
         <p:spPr>
           <a:xfrm>
-            <a:off x="839788" y="2057400"/>
-            <a:ext cx="3932237" cy="3811588"/>
+            <a:off x="256032" y="3493008"/>
+            <a:ext cx="2834640" cy="2322576"/>
           </a:xfrm>
         </p:spPr>
         <p:txBody>
-          <a:bodyPr/>
+          <a:bodyPr anchor="t">
+            <a:normAutofit/>
+          </a:bodyPr>
           <a:lstStyle>
             <a:lvl1pPr marL="0" indent="0">
-              <a:buNone/>
-              <a:defRPr sz="1600"/>
+              <a:lnSpc>
+                <a:spcPct val="100000"/>
+              </a:lnSpc>
+              <a:buNone/>
+              <a:defRPr sz="1400">
+                <a:solidFill>
+                  <a:srgbClr val="FFFFFF"/>
+                </a:solidFill>
+              </a:defRPr>
             </a:lvl1pPr>
             <a:lvl2pPr marL="457200" indent="0">
               <a:buNone/>
-              <a:defRPr sz="1400"/>
+              <a:defRPr sz="1200"/>
             </a:lvl2pPr>
             <a:lvl3pPr marL="914400" indent="0">
               <a:buNone/>
-              <a:defRPr sz="1200"/>
+              <a:defRPr sz="1000"/>
             </a:lvl3pPr>
             <a:lvl4pPr marL="1371600" indent="0">
               <a:buNone/>
-              <a:defRPr sz="1000"/>
+              <a:defRPr sz="900"/>
             </a:lvl4pPr>
             <a:lvl5pPr marL="1828800" indent="0">
               <a:buNone/>
-              <a:defRPr sz="1000"/>
+              <a:defRPr sz="900"/>
             </a:lvl5pPr>
             <a:lvl6pPr marL="2286000" indent="0">
               <a:buNone/>
-              <a:defRPr sz="1000"/>
+              <a:defRPr sz="900"/>
             </a:lvl6pPr>
             <a:lvl7pPr marL="2743200" indent="0">
               <a:buNone/>
-              <a:defRPr sz="1000"/>
+              <a:defRPr sz="900"/>
             </a:lvl7pPr>
             <a:lvl8pPr marL="3200400" indent="0">
               <a:buNone/>
-              <a:defRPr sz="1000"/>
+              <a:defRPr sz="900"/>
             </a:lvl8pPr>
             <a:lvl9pPr marL="3657600" indent="0">
               <a:buNone/>
-              <a:defRPr sz="1000"/>
+              <a:defRPr sz="900"/>
             </a:lvl9pPr>
           </a:lstStyle>
           <a:p>
             <a:pPr lvl="0"/>
             <a:r>
-              <a:rPr lang="en-US"/>
+              <a:rPr lang="en-GB"/>
               <a:t>Click to edit Master text styles</a:t>
             </a:r>
           </a:p>
@@ -2904,13 +2841,7 @@
       </p:sp>
       <p:sp>
         <p:nvSpPr>
-          <p:cNvPr id="5" name="Date Placeholder 4">
-            <a:extLst>
-              <a:ext uri="{FF2B5EF4-FFF2-40B4-BE49-F238E27FC236}">
-                <a16:creationId xmlns:a16="http://schemas.microsoft.com/office/drawing/2014/main" id="{D48EDF8E-0705-8D60-F1BA-EDC078B3F0AD}"/>
-              </a:ext>
-            </a:extLst>
-          </p:cNvPr>
+          <p:cNvPr id="8" name="Date Placeholder 7"/>
           <p:cNvSpPr>
             <a:spLocks noGrp="1"/>
           </p:cNvSpPr>
@@ -2925,7 +2856,7 @@
           <a:p>
             <a:fld id="{3E594C3D-A39B-4310-B7FD-B60219990675}" type="datetimeFigureOut">
               <a:rPr lang="en-IN" smtClean="0"/>
-              <a:t>27-08-2026</a:t>
+              <a:t>28-08-2026</a:t>
             </a:fld>
             <a:endParaRPr lang="en-IN"/>
           </a:p>
@@ -2933,13 +2864,7 @@
       </p:sp>
       <p:sp>
         <p:nvSpPr>
-          <p:cNvPr id="6" name="Footer Placeholder 5">
-            <a:extLst>
-              <a:ext uri="{FF2B5EF4-FFF2-40B4-BE49-F238E27FC236}">
-                <a16:creationId xmlns:a16="http://schemas.microsoft.com/office/drawing/2014/main" id="{D6BE2E5A-C265-6326-E9AC-2B375880C1BF}"/>
-              </a:ext>
-            </a:extLst>
-          </p:cNvPr>
+          <p:cNvPr id="9" name="Footer Placeholder 8"/>
           <p:cNvSpPr>
             <a:spLocks noGrp="1"/>
           </p:cNvSpPr>
@@ -2947,7 +2872,12 @@
             <p:ph type="ftr" sz="quarter" idx="11"/>
           </p:nvPr>
         </p:nvSpPr>
-        <p:spPr/>
+        <p:spPr>
+          <a:xfrm>
+            <a:off x="3499101" y="6356350"/>
+            <a:ext cx="5911517" cy="365125"/>
+          </a:xfrm>
+        </p:spPr>
         <p:txBody>
           <a:bodyPr/>
           <a:lstStyle/>
@@ -2958,13 +2888,7 @@
       </p:sp>
       <p:sp>
         <p:nvSpPr>
-          <p:cNvPr id="7" name="Slide Number Placeholder 6">
-            <a:extLst>
-              <a:ext uri="{FF2B5EF4-FFF2-40B4-BE49-F238E27FC236}">
-                <a16:creationId xmlns:a16="http://schemas.microsoft.com/office/drawing/2014/main" id="{5E6EDCF9-7060-673A-6F33-6B9C0EB818C1}"/>
-              </a:ext>
-            </a:extLst>
-          </p:cNvPr>
+          <p:cNvPr id="10" name="Slide Number Placeholder 9"/>
           <p:cNvSpPr>
             <a:spLocks noGrp="1"/>
           </p:cNvSpPr>
@@ -2988,7 +2912,7 @@
     </p:spTree>
     <p:extLst>
       <p:ext uri="{BB962C8B-B14F-4D97-AF65-F5344CB8AC3E}">
-        <p14:creationId xmlns:p14="http://schemas.microsoft.com/office/powerpoint/2010/main" val="857512866"/>
+        <p14:creationId xmlns:p14="http://schemas.microsoft.com/office/powerpoint/2010/main" val="3015912612"/>
       </p:ext>
     </p:extLst>
   </p:cSld>
@@ -3022,24 +2946,56 @@
       </p:grpSpPr>
       <p:sp>
         <p:nvSpPr>
-          <p:cNvPr id="2" name="Title Placeholder 1">
-            <a:extLst>
-              <a:ext uri="{FF2B5EF4-FFF2-40B4-BE49-F238E27FC236}">
-                <a16:creationId xmlns:a16="http://schemas.microsoft.com/office/drawing/2014/main" id="{55109A18-4FB5-74D6-3D23-A145CAFC55A8}"/>
-              </a:ext>
-            </a:extLst>
-          </p:cNvPr>
-          <p:cNvSpPr>
-            <a:spLocks noGrp="1"/>
-          </p:cNvSpPr>
-          <p:nvPr>
-            <p:ph type="title"/>
-          </p:nvPr>
+          <p:cNvPr id="7" name="Rectangle 6"/>
+          <p:cNvSpPr/>
+          <p:nvPr/>
         </p:nvSpPr>
         <p:spPr>
           <a:xfrm>
-            <a:off x="838200" y="365125"/>
-            <a:ext cx="10515600" cy="1325563"/>
+            <a:off x="1" y="758952"/>
+            <a:ext cx="3443590" cy="5330952"/>
+          </a:xfrm>
+          <a:prstGeom prst="rect">
+            <a:avLst/>
+          </a:prstGeom>
+          <a:solidFill>
+            <a:schemeClr val="accent1"/>
+          </a:solidFill>
+          <a:ln>
+            <a:noFill/>
+          </a:ln>
+        </p:spPr>
+        <p:style>
+          <a:lnRef idx="2">
+            <a:schemeClr val="accent1">
+              <a:shade val="50000"/>
+            </a:schemeClr>
+          </a:lnRef>
+          <a:fillRef idx="1">
+            <a:schemeClr val="accent1"/>
+          </a:fillRef>
+          <a:effectRef idx="0">
+            <a:schemeClr val="accent1"/>
+          </a:effectRef>
+          <a:fontRef idx="minor">
+            <a:schemeClr val="lt1"/>
+          </a:fontRef>
+        </p:style>
+      </p:sp>
+      <p:sp>
+        <p:nvSpPr>
+          <p:cNvPr id="2" name="Title Placeholder 1"/>
+          <p:cNvSpPr>
+            <a:spLocks noGrp="1"/>
+          </p:cNvSpPr>
+          <p:nvPr>
+            <p:ph type="title"/>
+          </p:nvPr>
+        </p:nvSpPr>
+        <p:spPr>
+          <a:xfrm>
+            <a:off x="252919" y="1123837"/>
+            <a:ext cx="2947482" cy="4601183"/>
           </a:xfrm>
           <a:prstGeom prst="rect">
             <a:avLst/>
@@ -3052,90 +3008,118 @@
           <a:lstStyle/>
           <a:p>
             <a:r>
-              <a:rPr lang="en-US"/>
+              <a:rPr lang="en-GB"/>
               <a:t>Click to edit Master title style</a:t>
             </a:r>
-            <a:endParaRPr lang="en-IN"/>
-          </a:p>
-        </p:txBody>
-      </p:sp>
-      <p:sp>
-        <p:nvSpPr>
-          <p:cNvPr id="3" name="Text Placeholder 2">
-            <a:extLst>
-              <a:ext uri="{FF2B5EF4-FFF2-40B4-BE49-F238E27FC236}">
-                <a16:creationId xmlns:a16="http://schemas.microsoft.com/office/drawing/2014/main" id="{BAA8F7BB-ECDF-0811-DE74-BD19695511CE}"/>
-              </a:ext>
-            </a:extLst>
-          </p:cNvPr>
-          <p:cNvSpPr>
-            <a:spLocks noGrp="1"/>
-          </p:cNvSpPr>
-          <p:nvPr>
-            <p:ph type="body" idx="1"/>
-          </p:nvPr>
+            <a:endParaRPr lang="en-US" dirty="0"/>
+          </a:p>
+        </p:txBody>
+      </p:sp>
+      <p:sp>
+        <p:nvSpPr>
+          <p:cNvPr id="38" name="Rectangle 37"/>
+          <p:cNvSpPr/>
+          <p:nvPr/>
         </p:nvSpPr>
         <p:spPr>
           <a:xfrm>
-            <a:off x="838200" y="1825625"/>
-            <a:ext cx="10515600" cy="4351338"/>
+            <a:off x="11815864" y="758952"/>
+            <a:ext cx="384048" cy="5330952"/>
+          </a:xfrm>
+          <a:prstGeom prst="rect">
+            <a:avLst/>
+          </a:prstGeom>
+          <a:solidFill>
+            <a:srgbClr val="C8C8C8">
+              <a:alpha val="49804"/>
+            </a:srgbClr>
+          </a:solidFill>
+          <a:ln>
+            <a:noFill/>
+          </a:ln>
+        </p:spPr>
+        <p:style>
+          <a:lnRef idx="2">
+            <a:schemeClr val="accent1">
+              <a:shade val="50000"/>
+            </a:schemeClr>
+          </a:lnRef>
+          <a:fillRef idx="1">
+            <a:schemeClr val="accent1"/>
+          </a:fillRef>
+          <a:effectRef idx="0">
+            <a:schemeClr val="accent1"/>
+          </a:effectRef>
+          <a:fontRef idx="minor">
+            <a:schemeClr val="lt1"/>
+          </a:fontRef>
+        </p:style>
+      </p:sp>
+      <p:sp>
+        <p:nvSpPr>
+          <p:cNvPr id="3" name="Text Placeholder 2"/>
+          <p:cNvSpPr>
+            <a:spLocks noGrp="1"/>
+          </p:cNvSpPr>
+          <p:nvPr>
+            <p:ph type="body" idx="1"/>
+          </p:nvPr>
+        </p:nvSpPr>
+        <p:spPr>
+          <a:xfrm>
+            <a:off x="3869268" y="864108"/>
+            <a:ext cx="7315200" cy="5120640"/>
           </a:xfrm>
           <a:prstGeom prst="rect">
             <a:avLst/>
           </a:prstGeom>
         </p:spPr>
         <p:txBody>
-          <a:bodyPr vert="horz" lIns="91440" tIns="45720" rIns="91440" bIns="45720" rtlCol="0">
+          <a:bodyPr vert="horz" lIns="91440" tIns="45720" rIns="91440" bIns="45720" rtlCol="0" anchor="ctr">
             <a:normAutofit/>
           </a:bodyPr>
           <a:lstStyle/>
           <a:p>
             <a:pPr lvl="0"/>
             <a:r>
-              <a:rPr lang="en-US"/>
+              <a:rPr lang="en-GB"/>
               <a:t>Click to edit Master text styles</a:t>
             </a:r>
           </a:p>
           <a:p>
             <a:pPr lvl="1"/>
             <a:r>
-              <a:rPr lang="en-US"/>
+              <a:rPr lang="en-GB"/>
               <a:t>Second level</a:t>
             </a:r>
           </a:p>
           <a:p>
             <a:pPr lvl="2"/>
             <a:r>
-              <a:rPr lang="en-US"/>
+              <a:rPr lang="en-GB"/>
               <a:t>Third level</a:t>
             </a:r>
           </a:p>
           <a:p>
             <a:pPr lvl="3"/>
             <a:r>
-              <a:rPr lang="en-US"/>
+              <a:rPr lang="en-GB"/>
               <a:t>Fourth level</a:t>
             </a:r>
           </a:p>
           <a:p>
             <a:pPr lvl="4"/>
             <a:r>
-              <a:rPr lang="en-US"/>
+              <a:rPr lang="en-GB"/>
               <a:t>Fifth level</a:t>
             </a:r>
-            <a:endParaRPr lang="en-IN"/>
-          </a:p>
-        </p:txBody>
-      </p:sp>
-      <p:sp>
-        <p:nvSpPr>
-          <p:cNvPr id="4" name="Date Placeholder 3">
-            <a:extLst>
-              <a:ext uri="{FF2B5EF4-FFF2-40B4-BE49-F238E27FC236}">
-                <a16:creationId xmlns:a16="http://schemas.microsoft.com/office/drawing/2014/main" id="{F90D51CD-2320-F082-D428-86F161266609}"/>
-              </a:ext>
-            </a:extLst>
-          </p:cNvPr>
+            <a:endParaRPr lang="en-US" dirty="0"/>
+          </a:p>
+        </p:txBody>
+      </p:sp>
+      <p:sp>
+        <p:nvSpPr>
+          <p:cNvPr id="4" name="Date Placeholder 3"/>
           <p:cNvSpPr>
             <a:spLocks noGrp="1"/>
           </p:cNvSpPr>
@@ -3145,7 +3129,7 @@
         </p:nvSpPr>
         <p:spPr>
           <a:xfrm>
-            <a:off x="838200" y="6356350"/>
+            <a:off x="262465" y="6356350"/>
             <a:ext cx="2743200" cy="365125"/>
           </a:xfrm>
           <a:prstGeom prst="rect">
@@ -3156,10 +3140,11 @@
           <a:bodyPr vert="horz" lIns="91440" tIns="45720" rIns="91440" bIns="45720" rtlCol="0" anchor="ctr"/>
           <a:lstStyle>
             <a:lvl1pPr algn="l">
-              <a:defRPr sz="1200">
+              <a:defRPr sz="1100">
                 <a:solidFill>
                   <a:schemeClr val="tx1">
-                    <a:tint val="82000"/>
+                    <a:lumMod val="50000"/>
+                    <a:lumOff val="50000"/>
                   </a:schemeClr>
                 </a:solidFill>
               </a:defRPr>
@@ -3168,7 +3153,7 @@
           <a:p>
             <a:fld id="{3E594C3D-A39B-4310-B7FD-B60219990675}" type="datetimeFigureOut">
               <a:rPr lang="en-IN" smtClean="0"/>
-              <a:t>27-08-2026</a:t>
+              <a:t>28-08-2026</a:t>
             </a:fld>
             <a:endParaRPr lang="en-IN"/>
           </a:p>
@@ -3176,13 +3161,7 @@
       </p:sp>
       <p:sp>
         <p:nvSpPr>
-          <p:cNvPr id="5" name="Footer Placeholder 4">
-            <a:extLst>
-              <a:ext uri="{FF2B5EF4-FFF2-40B4-BE49-F238E27FC236}">
-                <a16:creationId xmlns:a16="http://schemas.microsoft.com/office/drawing/2014/main" id="{21A6DB0E-6351-E32D-7009-AACD48ABF90C}"/>
-              </a:ext>
-            </a:extLst>
-          </p:cNvPr>
+          <p:cNvPr id="5" name="Footer Placeholder 4"/>
           <p:cNvSpPr>
             <a:spLocks noGrp="1"/>
           </p:cNvSpPr>
@@ -3192,8 +3171,8 @@
         </p:nvSpPr>
         <p:spPr>
           <a:xfrm>
-            <a:off x="4038600" y="6356350"/>
-            <a:ext cx="4114800" cy="365125"/>
+            <a:off x="3869268" y="6356350"/>
+            <a:ext cx="5911517" cy="365125"/>
           </a:xfrm>
           <a:prstGeom prst="rect">
             <a:avLst/>
@@ -3202,11 +3181,12 @@
         <p:txBody>
           <a:bodyPr vert="horz" lIns="91440" tIns="45720" rIns="91440" bIns="45720" rtlCol="0" anchor="ctr"/>
           <a:lstStyle>
-            <a:lvl1pPr algn="ctr">
-              <a:defRPr sz="1200">
+            <a:lvl1pPr algn="l">
+              <a:defRPr sz="1100">
                 <a:solidFill>
                   <a:schemeClr val="tx1">
-                    <a:tint val="82000"/>
+                    <a:lumMod val="50000"/>
+                    <a:lumOff val="50000"/>
                   </a:schemeClr>
                 </a:solidFill>
               </a:defRPr>
@@ -3219,13 +3199,7 @@
       </p:sp>
       <p:sp>
         <p:nvSpPr>
-          <p:cNvPr id="6" name="Slide Number Placeholder 5">
-            <a:extLst>
-              <a:ext uri="{FF2B5EF4-FFF2-40B4-BE49-F238E27FC236}">
-                <a16:creationId xmlns:a16="http://schemas.microsoft.com/office/drawing/2014/main" id="{A20985B2-71AA-B295-525B-46087D8B5AEA}"/>
-              </a:ext>
-            </a:extLst>
-          </p:cNvPr>
+          <p:cNvPr id="6" name="Slide Number Placeholder 5"/>
           <p:cNvSpPr>
             <a:spLocks noGrp="1"/>
           </p:cNvSpPr>
@@ -3235,8 +3209,8 @@
         </p:nvSpPr>
         <p:spPr>
           <a:xfrm>
-            <a:off x="8610600" y="6356350"/>
-            <a:ext cx="2743200" cy="365125"/>
+            <a:off x="10634135" y="6356350"/>
+            <a:ext cx="1530927" cy="365125"/>
           </a:xfrm>
           <a:prstGeom prst="rect">
             <a:avLst/>
@@ -3246,11 +3220,9 @@
           <a:bodyPr vert="horz" lIns="91440" tIns="45720" rIns="91440" bIns="45720" rtlCol="0" anchor="ctr"/>
           <a:lstStyle>
             <a:lvl1pPr algn="r">
-              <a:defRPr sz="1200">
+              <a:defRPr sz="1200" b="1">
                 <a:solidFill>
-                  <a:schemeClr val="tx1">
-                    <a:tint val="82000"/>
-                  </a:schemeClr>
+                  <a:schemeClr val="accent1"/>
                 </a:solidFill>
               </a:defRPr>
             </a:lvl1pPr>
@@ -3267,23 +3239,23 @@
     </p:spTree>
     <p:extLst>
       <p:ext uri="{BB962C8B-B14F-4D97-AF65-F5344CB8AC3E}">
-        <p14:creationId xmlns:p14="http://schemas.microsoft.com/office/powerpoint/2010/main" val="2682910950"/>
+        <p14:creationId xmlns:p14="http://schemas.microsoft.com/office/powerpoint/2010/main" val="3202725354"/>
       </p:ext>
     </p:extLst>
   </p:cSld>
   <p:clrMap bg1="lt1" tx1="dk1" bg2="lt2" tx2="dk2" accent1="accent1" accent2="accent2" accent3="accent3" accent4="accent4" accent5="accent5" accent6="accent6" hlink="hlink" folHlink="folHlink"/>
   <p:sldLayoutIdLst>
-    <p:sldLayoutId id="2147483649" r:id="rId1"/>
-    <p:sldLayoutId id="2147483650" r:id="rId2"/>
-    <p:sldLayoutId id="2147483651" r:id="rId3"/>
-    <p:sldLayoutId id="2147483652" r:id="rId4"/>
-    <p:sldLayoutId id="2147483653" r:id="rId5"/>
-    <p:sldLayoutId id="2147483654" r:id="rId6"/>
-    <p:sldLayoutId id="2147483655" r:id="rId7"/>
-    <p:sldLayoutId id="2147483656" r:id="rId8"/>
-    <p:sldLayoutId id="2147483657" r:id="rId9"/>
-    <p:sldLayoutId id="2147483658" r:id="rId10"/>
-    <p:sldLayoutId id="2147483659" r:id="rId11"/>
+    <p:sldLayoutId id="2147483691" r:id="rId1"/>
+    <p:sldLayoutId id="2147483692" r:id="rId2"/>
+    <p:sldLayoutId id="2147483693" r:id="rId3"/>
+    <p:sldLayoutId id="2147483694" r:id="rId4"/>
+    <p:sldLayoutId id="2147483695" r:id="rId5"/>
+    <p:sldLayoutId id="2147483696" r:id="rId6"/>
+    <p:sldLayoutId id="2147483697" r:id="rId7"/>
+    <p:sldLayoutId id="2147483698" r:id="rId8"/>
+    <p:sldLayoutId id="2147483699" r:id="rId9"/>
+    <p:sldLayoutId id="2147483700" r:id="rId10"/>
+    <p:sldLayoutId id="2147483701" r:id="rId11"/>
   </p:sldLayoutIdLst>
   <p:txStyles>
     <p:titleStyle>
@@ -3295,9 +3267,9 @@
           <a:spcPct val="0"/>
         </a:spcBef>
         <a:buNone/>
-        <a:defRPr sz="4400" kern="1200">
+        <a:defRPr sz="3600" kern="1200" spc="-60" baseline="0">
           <a:solidFill>
-            <a:schemeClr val="tx1"/>
+            <a:srgbClr val="FFFFFF"/>
           </a:solidFill>
           <a:latin typeface="+mj-lt"/>
           <a:ea typeface="+mj-ea"/>
@@ -3306,90 +3278,132 @@
       </a:lvl1pPr>
     </p:titleStyle>
     <p:bodyStyle>
-      <a:lvl1pPr marL="228600" indent="-228600" algn="l" defTabSz="914400" rtl="0" eaLnBrk="1" latinLnBrk="0" hangingPunct="1">
+      <a:lvl1pPr marL="182880" indent="-182880" algn="l" defTabSz="914400" rtl="0" eaLnBrk="1" latinLnBrk="0" hangingPunct="1">
         <a:lnSpc>
           <a:spcPct val="90000"/>
         </a:lnSpc>
         <a:spcBef>
-          <a:spcPts val="1000"/>
+          <a:spcPts val="1200"/>
         </a:spcBef>
-        <a:buFont typeface="Arial" panose="020B0604020202020204" pitchFamily="34" charset="0"/>
-        <a:buChar char="•"/>
-        <a:defRPr sz="2800" kern="1200">
+        <a:buClr>
+          <a:schemeClr val="accent1"/>
+        </a:buClr>
+        <a:buFont typeface="Wingdings 2" pitchFamily="18" charset="2"/>
+        <a:buChar char=""/>
+        <a:defRPr sz="2000" kern="1200">
           <a:solidFill>
-            <a:schemeClr val="tx1"/>
+            <a:schemeClr val="tx1">
+              <a:lumMod val="65000"/>
+              <a:lumOff val="35000"/>
+            </a:schemeClr>
           </a:solidFill>
           <a:latin typeface="+mn-lt"/>
           <a:ea typeface="+mn-ea"/>
           <a:cs typeface="+mn-cs"/>
         </a:defRPr>
       </a:lvl1pPr>
-      <a:lvl2pPr marL="685800" indent="-228600" algn="l" defTabSz="914400" rtl="0" eaLnBrk="1" latinLnBrk="0" hangingPunct="1">
+      <a:lvl2pPr marL="685800" indent="-182880" algn="l" defTabSz="914400" rtl="0" eaLnBrk="1" latinLnBrk="0" hangingPunct="1">
         <a:lnSpc>
           <a:spcPct val="90000"/>
         </a:lnSpc>
         <a:spcBef>
-          <a:spcPts val="500"/>
+          <a:spcPts val="250"/>
         </a:spcBef>
-        <a:buFont typeface="Arial" panose="020B0604020202020204" pitchFamily="34" charset="0"/>
-        <a:buChar char="•"/>
-        <a:defRPr sz="2400" kern="1200">
+        <a:spcAft>
+          <a:spcPts val="250"/>
+        </a:spcAft>
+        <a:buClr>
+          <a:schemeClr val="accent1"/>
+        </a:buClr>
+        <a:buFont typeface="Wingdings 2" pitchFamily="18" charset="2"/>
+        <a:buChar char=""/>
+        <a:defRPr sz="1800" kern="1200">
           <a:solidFill>
-            <a:schemeClr val="tx1"/>
+            <a:schemeClr val="tx1">
+              <a:lumMod val="65000"/>
+              <a:lumOff val="35000"/>
+            </a:schemeClr>
           </a:solidFill>
           <a:latin typeface="+mn-lt"/>
           <a:ea typeface="+mn-ea"/>
           <a:cs typeface="+mn-cs"/>
         </a:defRPr>
       </a:lvl2pPr>
-      <a:lvl3pPr marL="1143000" indent="-228600" algn="l" defTabSz="914400" rtl="0" eaLnBrk="1" latinLnBrk="0" hangingPunct="1">
+      <a:lvl3pPr marL="1143000" indent="-182880" algn="l" defTabSz="914400" rtl="0" eaLnBrk="1" latinLnBrk="0" hangingPunct="1">
         <a:lnSpc>
           <a:spcPct val="90000"/>
         </a:lnSpc>
         <a:spcBef>
-          <a:spcPts val="500"/>
+          <a:spcPts val="250"/>
         </a:spcBef>
-        <a:buFont typeface="Arial" panose="020B0604020202020204" pitchFamily="34" charset="0"/>
-        <a:buChar char="•"/>
-        <a:defRPr sz="2000" kern="1200">
+        <a:spcAft>
+          <a:spcPts val="250"/>
+        </a:spcAft>
+        <a:buClr>
+          <a:schemeClr val="accent1"/>
+        </a:buClr>
+        <a:buFont typeface="Wingdings 2" pitchFamily="18" charset="2"/>
+        <a:buChar char=""/>
+        <a:defRPr sz="1600" kern="1200">
           <a:solidFill>
-            <a:schemeClr val="tx1"/>
+            <a:schemeClr val="tx1">
+              <a:lumMod val="65000"/>
+              <a:lumOff val="35000"/>
+            </a:schemeClr>
           </a:solidFill>
           <a:latin typeface="+mn-lt"/>
           <a:ea typeface="+mn-ea"/>
           <a:cs typeface="+mn-cs"/>
         </a:defRPr>
       </a:lvl3pPr>
-      <a:lvl4pPr marL="1600200" indent="-228600" algn="l" defTabSz="914400" rtl="0" eaLnBrk="1" latinLnBrk="0" hangingPunct="1">
+      <a:lvl4pPr marL="1600200" indent="-182880" algn="l" defTabSz="914400" rtl="0" eaLnBrk="1" latinLnBrk="0" hangingPunct="1">
         <a:lnSpc>
           <a:spcPct val="90000"/>
         </a:lnSpc>
         <a:spcBef>
-          <a:spcPts val="500"/>
+          <a:spcPts val="250"/>
         </a:spcBef>
-        <a:buFont typeface="Arial" panose="020B0604020202020204" pitchFamily="34" charset="0"/>
-        <a:buChar char="•"/>
-        <a:defRPr sz="1800" kern="1200">
+        <a:spcAft>
+          <a:spcPts val="250"/>
+        </a:spcAft>
+        <a:buClr>
+          <a:schemeClr val="accent1"/>
+        </a:buClr>
+        <a:buFont typeface="Wingdings 2" pitchFamily="18" charset="2"/>
+        <a:buChar char=""/>
+        <a:defRPr sz="1400" kern="1200">
           <a:solidFill>
-            <a:schemeClr val="tx1"/>
+            <a:schemeClr val="tx1">
+              <a:lumMod val="65000"/>
+              <a:lumOff val="35000"/>
+            </a:schemeClr>
           </a:solidFill>
           <a:latin typeface="+mn-lt"/>
           <a:ea typeface="+mn-ea"/>
           <a:cs typeface="+mn-cs"/>
         </a:defRPr>
       </a:lvl4pPr>
-      <a:lvl5pPr marL="2057400" indent="-228600" algn="l" defTabSz="914400" rtl="0" eaLnBrk="1" latinLnBrk="0" hangingPunct="1">
+      <a:lvl5pPr marL="2057400" indent="-182880" algn="l" defTabSz="914400" rtl="0" eaLnBrk="1" latinLnBrk="0" hangingPunct="1">
         <a:lnSpc>
           <a:spcPct val="90000"/>
         </a:lnSpc>
         <a:spcBef>
-          <a:spcPts val="500"/>
+          <a:spcPts val="250"/>
         </a:spcBef>
-        <a:buFont typeface="Arial" panose="020B0604020202020204" pitchFamily="34" charset="0"/>
-        <a:buChar char="•"/>
-        <a:defRPr sz="1800" kern="1200">
+        <a:spcAft>
+          <a:spcPts val="250"/>
+        </a:spcAft>
+        <a:buClr>
+          <a:schemeClr val="accent1"/>
+        </a:buClr>
+        <a:buFont typeface="Wingdings 2" pitchFamily="18" charset="2"/>
+        <a:buChar char=""/>
+        <a:defRPr sz="1400" kern="1200">
           <a:solidFill>
-            <a:schemeClr val="tx1"/>
+            <a:schemeClr val="tx1">
+              <a:lumMod val="65000"/>
+              <a:lumOff val="35000"/>
+            </a:schemeClr>
           </a:solidFill>
           <a:latin typeface="+mn-lt"/>
           <a:ea typeface="+mn-ea"/>
@@ -3401,13 +3415,22 @@
           <a:spcPct val="90000"/>
         </a:lnSpc>
         <a:spcBef>
-          <a:spcPts val="500"/>
+          <a:spcPts val="250"/>
         </a:spcBef>
-        <a:buFont typeface="Arial" panose="020B0604020202020204" pitchFamily="34" charset="0"/>
-        <a:buChar char="•"/>
-        <a:defRPr sz="1800" kern="1200">
+        <a:spcAft>
+          <a:spcPts val="250"/>
+        </a:spcAft>
+        <a:buClr>
+          <a:schemeClr val="accent1"/>
+        </a:buClr>
+        <a:buFont typeface="Wingdings 2" pitchFamily="18" charset="2"/>
+        <a:buChar char=""/>
+        <a:defRPr sz="1400" kern="1200">
           <a:solidFill>
-            <a:schemeClr val="tx1"/>
+            <a:schemeClr val="tx1">
+              <a:lumMod val="65000"/>
+              <a:lumOff val="35000"/>
+            </a:schemeClr>
           </a:solidFill>
           <a:latin typeface="+mn-lt"/>
           <a:ea typeface="+mn-ea"/>
@@ -3419,13 +3442,22 @@
           <a:spcPct val="90000"/>
         </a:lnSpc>
         <a:spcBef>
-          <a:spcPts val="500"/>
+          <a:spcPts val="250"/>
         </a:spcBef>
-        <a:buFont typeface="Arial" panose="020B0604020202020204" pitchFamily="34" charset="0"/>
-        <a:buChar char="•"/>
-        <a:defRPr sz="1800" kern="1200">
+        <a:spcAft>
+          <a:spcPts val="250"/>
+        </a:spcAft>
+        <a:buClr>
+          <a:schemeClr val="accent1"/>
+        </a:buClr>
+        <a:buFont typeface="Wingdings 2" pitchFamily="18" charset="2"/>
+        <a:buChar char=""/>
+        <a:defRPr sz="1400" kern="1200">
           <a:solidFill>
-            <a:schemeClr val="tx1"/>
+            <a:schemeClr val="tx1">
+              <a:lumMod val="65000"/>
+              <a:lumOff val="35000"/>
+            </a:schemeClr>
           </a:solidFill>
           <a:latin typeface="+mn-lt"/>
           <a:ea typeface="+mn-ea"/>
@@ -3437,13 +3469,22 @@
           <a:spcPct val="90000"/>
         </a:lnSpc>
         <a:spcBef>
-          <a:spcPts val="500"/>
+          <a:spcPts val="250"/>
         </a:spcBef>
-        <a:buFont typeface="Arial" panose="020B0604020202020204" pitchFamily="34" charset="0"/>
-        <a:buChar char="•"/>
-        <a:defRPr sz="1800" kern="1200">
+        <a:spcAft>
+          <a:spcPts val="250"/>
+        </a:spcAft>
+        <a:buClr>
+          <a:schemeClr val="accent1"/>
+        </a:buClr>
+        <a:buFont typeface="Wingdings 2" pitchFamily="18" charset="2"/>
+        <a:buChar char=""/>
+        <a:defRPr sz="1400" kern="1200">
           <a:solidFill>
-            <a:schemeClr val="tx1"/>
+            <a:schemeClr val="tx1">
+              <a:lumMod val="65000"/>
+              <a:lumOff val="35000"/>
+            </a:schemeClr>
           </a:solidFill>
           <a:latin typeface="+mn-lt"/>
           <a:ea typeface="+mn-ea"/>
@@ -3455,13 +3496,22 @@
           <a:spcPct val="90000"/>
         </a:lnSpc>
         <a:spcBef>
-          <a:spcPts val="500"/>
+          <a:spcPts val="250"/>
         </a:spcBef>
-        <a:buFont typeface="Arial" panose="020B0604020202020204" pitchFamily="34" charset="0"/>
-        <a:buChar char="•"/>
-        <a:defRPr sz="1800" kern="1200">
+        <a:spcAft>
+          <a:spcPts val="250"/>
+        </a:spcAft>
+        <a:buClr>
+          <a:schemeClr val="accent1"/>
+        </a:buClr>
+        <a:buFont typeface="Wingdings 2" pitchFamily="18" charset="2"/>
+        <a:buChar char=""/>
+        <a:defRPr sz="1400" kern="1200">
           <a:solidFill>
-            <a:schemeClr val="tx1"/>
+            <a:schemeClr val="tx1">
+              <a:lumMod val="65000"/>
+              <a:lumOff val="35000"/>
+            </a:schemeClr>
           </a:solidFill>
           <a:latin typeface="+mn-lt"/>
           <a:ea typeface="+mn-ea"/>
@@ -3565,6 +3615,11 @@
       </a:lvl9pPr>
     </p:otherStyle>
   </p:txStyles>
+  <p:extLst>
+    <p:ext uri="{27BBF7A9-308A-43DC-89C8-2F10F3537804}">
+      <p15:sldGuideLst xmlns:p15="http://schemas.microsoft.com/office/powerpoint/2012/main"/>
+    </p:ext>
+  </p:extLst>
 </p:sldMaster>
 </file>
 
@@ -3719,7 +3774,7 @@
         <p:spPr/>
         <p:txBody>
           <a:bodyPr>
-            <a:normAutofit fontScale="92500" lnSpcReduction="10000"/>
+            <a:normAutofit/>
           </a:bodyPr>
           <a:lstStyle/>
           <a:p>
@@ -4526,8 +4581,8 @@
           </p:nvPr>
         </p:nvGraphicFramePr>
         <p:xfrm>
-          <a:off x="838200" y="1825625"/>
-          <a:ext cx="10515600" cy="3708400"/>
+          <a:off x="3868738" y="863600"/>
+          <a:ext cx="7315200" cy="5598160"/>
         </p:xfrm>
         <a:graphic>
           <a:graphicData uri="http://schemas.openxmlformats.org/drawingml/2006/table">
@@ -4536,14 +4591,14 @@
                 <a:tableStyleId>{5C22544A-7EE6-4342-B048-85BDC9FD1C3A}</a:tableStyleId>
               </a:tblPr>
               <a:tblGrid>
-                <a:gridCol w="2015067">
+                <a:gridCol w="1401786">
                   <a:extLst>
                     <a:ext uri="{9D8B030D-6E8A-4147-A177-3AD203B41FA5}">
                       <a16:colId xmlns:a16="http://schemas.microsoft.com/office/drawing/2014/main" val="1694806031"/>
                     </a:ext>
                   </a:extLst>
                 </a:gridCol>
-                <a:gridCol w="8500533">
+                <a:gridCol w="5913414">
                   <a:extLst>
                     <a:ext uri="{9D8B030D-6E8A-4147-A177-3AD203B41FA5}">
                       <a16:colId xmlns:a16="http://schemas.microsoft.com/office/drawing/2014/main" val="911155316"/>
@@ -4564,7 +4619,7 @@
                       <a:endParaRPr lang="en-IN" dirty="0"/>
                     </a:p>
                   </a:txBody>
-                  <a:tcPr/>
+                  <a:tcPr marL="63611" marR="63611"/>
                 </a:tc>
                 <a:tc>
                   <a:txBody>
@@ -4577,7 +4632,7 @@
                       </a:r>
                     </a:p>
                   </a:txBody>
-                  <a:tcPr/>
+                  <a:tcPr marL="63611" marR="63611"/>
                 </a:tc>
                 <a:extLst>
                   <a:ext uri="{0D108BD9-81ED-4DB2-BD59-A6C34878D82A}">
@@ -4597,7 +4652,7 @@
                       </a:r>
                     </a:p>
                   </a:txBody>
-                  <a:tcPr/>
+                  <a:tcPr marL="63611" marR="63611"/>
                 </a:tc>
                 <a:tc>
                   <a:txBody>
@@ -4611,7 +4666,7 @@
                       <a:endParaRPr lang="en-IN" dirty="0"/>
                     </a:p>
                   </a:txBody>
-                  <a:tcPr/>
+                  <a:tcPr marL="63611" marR="63611"/>
                 </a:tc>
                 <a:extLst>
                   <a:ext uri="{0D108BD9-81ED-4DB2-BD59-A6C34878D82A}">
@@ -4631,7 +4686,7 @@
                       </a:r>
                     </a:p>
                   </a:txBody>
-                  <a:tcPr/>
+                  <a:tcPr marL="63611" marR="63611"/>
                 </a:tc>
                 <a:tc>
                   <a:txBody>
@@ -4644,7 +4699,7 @@
                       </a:r>
                     </a:p>
                   </a:txBody>
-                  <a:tcPr/>
+                  <a:tcPr marL="63611" marR="63611"/>
                 </a:tc>
                 <a:extLst>
                   <a:ext uri="{0D108BD9-81ED-4DB2-BD59-A6C34878D82A}">
@@ -4664,7 +4719,7 @@
                       </a:r>
                     </a:p>
                   </a:txBody>
-                  <a:tcPr/>
+                  <a:tcPr marL="63611" marR="63611"/>
                 </a:tc>
                 <a:tc>
                   <a:txBody>
@@ -4677,7 +4732,7 @@
                       </a:r>
                     </a:p>
                   </a:txBody>
-                  <a:tcPr/>
+                  <a:tcPr marL="63611" marR="63611"/>
                 </a:tc>
                 <a:extLst>
                   <a:ext uri="{0D108BD9-81ED-4DB2-BD59-A6C34878D82A}">
@@ -4697,7 +4752,7 @@
                       </a:r>
                     </a:p>
                   </a:txBody>
-                  <a:tcPr/>
+                  <a:tcPr marL="63611" marR="63611"/>
                 </a:tc>
                 <a:tc>
                   <a:txBody>
@@ -4711,7 +4766,7 @@
                       <a:endParaRPr lang="en-IN" dirty="0"/>
                     </a:p>
                   </a:txBody>
-                  <a:tcPr/>
+                  <a:tcPr marL="63611" marR="63611"/>
                 </a:tc>
                 <a:extLst>
                   <a:ext uri="{0D108BD9-81ED-4DB2-BD59-A6C34878D82A}">
@@ -4731,7 +4786,7 @@
                       </a:r>
                     </a:p>
                   </a:txBody>
-                  <a:tcPr/>
+                  <a:tcPr marL="63611" marR="63611"/>
                 </a:tc>
                 <a:tc>
                   <a:txBody>
@@ -4748,7 +4803,7 @@
                       </a:r>
                     </a:p>
                   </a:txBody>
-                  <a:tcPr/>
+                  <a:tcPr marL="63611" marR="63611"/>
                 </a:tc>
                 <a:extLst>
                   <a:ext uri="{0D108BD9-81ED-4DB2-BD59-A6C34878D82A}">
@@ -4768,7 +4823,7 @@
                       </a:r>
                     </a:p>
                   </a:txBody>
-                  <a:tcPr/>
+                  <a:tcPr marL="63611" marR="63611"/>
                 </a:tc>
                 <a:tc>
                   <a:txBody>
@@ -4794,7 +4849,7 @@
                       <a:endParaRPr lang="en-IN" dirty="0"/>
                     </a:p>
                   </a:txBody>
-                  <a:tcPr/>
+                  <a:tcPr marL="63611" marR="63611"/>
                 </a:tc>
                 <a:extLst>
                   <a:ext uri="{0D108BD9-81ED-4DB2-BD59-A6C34878D82A}">
@@ -4814,7 +4869,7 @@
                       </a:r>
                     </a:p>
                   </a:txBody>
-                  <a:tcPr/>
+                  <a:tcPr marL="63611" marR="63611"/>
                 </a:tc>
                 <a:tc>
                   <a:txBody>
@@ -4840,7 +4895,7 @@
                       <a:endParaRPr lang="en-IN" dirty="0"/>
                     </a:p>
                   </a:txBody>
-                  <a:tcPr/>
+                  <a:tcPr marL="63611" marR="63611"/>
                 </a:tc>
                 <a:extLst>
                   <a:ext uri="{0D108BD9-81ED-4DB2-BD59-A6C34878D82A}">
@@ -4860,7 +4915,7 @@
                       </a:r>
                     </a:p>
                   </a:txBody>
-                  <a:tcPr/>
+                  <a:tcPr marL="63611" marR="63611"/>
                 </a:tc>
                 <a:tc>
                   <a:txBody>
@@ -4878,7 +4933,7 @@
                       <a:endParaRPr lang="en-IN" dirty="0"/>
                     </a:p>
                   </a:txBody>
-                  <a:tcPr/>
+                  <a:tcPr marL="63611" marR="63611"/>
                 </a:tc>
                 <a:extLst>
                   <a:ext uri="{0D108BD9-81ED-4DB2-BD59-A6C34878D82A}">
@@ -4898,7 +4953,7 @@
                       </a:r>
                     </a:p>
                   </a:txBody>
-                  <a:tcPr/>
+                  <a:tcPr marL="63611" marR="63611"/>
                 </a:tc>
                 <a:tc>
                   <a:txBody>
@@ -4912,7 +4967,7 @@
                       <a:endParaRPr lang="en-IN" dirty="0"/>
                     </a:p>
                   </a:txBody>
-                  <a:tcPr/>
+                  <a:tcPr marL="63611" marR="63611"/>
                 </a:tc>
                 <a:extLst>
                   <a:ext uri="{0D108BD9-81ED-4DB2-BD59-A6C34878D82A}">
@@ -5008,7 +5063,7 @@
         <p:spPr/>
         <p:txBody>
           <a:bodyPr>
-            <a:normAutofit fontScale="92500"/>
+            <a:normAutofit/>
           </a:bodyPr>
           <a:lstStyle/>
           <a:p>
@@ -5256,110 +5311,58 @@
 </file>
 
 <file path=ppt/theme/theme1.xml><?xml version="1.0" encoding="utf-8"?>
-<a:theme xmlns:a="http://schemas.openxmlformats.org/drawingml/2006/main" name="Office Theme">
+<a:theme xmlns:a="http://schemas.openxmlformats.org/drawingml/2006/main" name="Frame">
   <a:themeElements>
-    <a:clrScheme name="Office">
+    <a:clrScheme name="Frame">
       <a:dk1>
-        <a:sysClr val="windowText" lastClr="000000"/>
+        <a:srgbClr val="000000"/>
       </a:dk1>
       <a:lt1>
-        <a:sysClr val="window" lastClr="FFFFFF"/>
+        <a:srgbClr val="FFFFFF"/>
       </a:lt1>
       <a:dk2>
-        <a:srgbClr val="0E2841"/>
+        <a:srgbClr val="545454"/>
       </a:dk2>
       <a:lt2>
-        <a:srgbClr val="E8E8E8"/>
+        <a:srgbClr val="BFBFBF"/>
       </a:lt2>
       <a:accent1>
-        <a:srgbClr val="156082"/>
+        <a:srgbClr val="40BAD2"/>
       </a:accent1>
       <a:accent2>
-        <a:srgbClr val="E97132"/>
+        <a:srgbClr val="FAB900"/>
       </a:accent2>
       <a:accent3>
-        <a:srgbClr val="196B24"/>
+        <a:srgbClr val="90BB23"/>
       </a:accent3>
       <a:accent4>
-        <a:srgbClr val="0F9ED5"/>
+        <a:srgbClr val="EE7008"/>
       </a:accent4>
       <a:accent5>
-        <a:srgbClr val="A02B93"/>
+        <a:srgbClr val="1AB39F"/>
       </a:accent5>
       <a:accent6>
-        <a:srgbClr val="4EA72E"/>
+        <a:srgbClr val="D5393D"/>
       </a:accent6>
       <a:hlink>
-        <a:srgbClr val="467886"/>
+        <a:srgbClr val="90BB23"/>
       </a:hlink>
       <a:folHlink>
-        <a:srgbClr val="96607D"/>
+        <a:srgbClr val="EE7008"/>
       </a:folHlink>
     </a:clrScheme>
-    <a:fontScheme name="Office">
+    <a:fontScheme name="Frame">
       <a:majorFont>
-        <a:latin typeface="Aptos Display" panose="02110004020202020204"/>
+        <a:latin typeface="Corbel" panose="020B0503020204020204"/>
         <a:ea typeface=""/>
         <a:cs typeface=""/>
-        <a:font script="Jpan" typeface="游ゴシック Light"/>
-        <a:font script="Hang" typeface="맑은 고딕"/>
-        <a:font script="Hans" typeface="等线 Light"/>
-        <a:font script="Hant" typeface="新細明體"/>
-        <a:font script="Arab" typeface="Times New Roman"/>
-        <a:font script="Hebr" typeface="Times New Roman"/>
-        <a:font script="Thai" typeface="Angsana New"/>
-        <a:font script="Ethi" typeface="Nyala"/>
-        <a:font script="Beng" typeface="Vrinda"/>
-        <a:font script="Gujr" typeface="Shruti"/>
-        <a:font script="Khmr" typeface="MoolBoran"/>
-        <a:font script="Knda" typeface="Tunga"/>
-        <a:font script="Guru" typeface="Raavi"/>
-        <a:font script="Cans" typeface="Euphemia"/>
-        <a:font script="Cher" typeface="Plantagenet Cherokee"/>
-        <a:font script="Yiii" typeface="Microsoft Yi Baiti"/>
-        <a:font script="Tibt" typeface="Microsoft Himalaya"/>
-        <a:font script="Thaa" typeface="MV Boli"/>
-        <a:font script="Deva" typeface="Mangal"/>
-        <a:font script="Telu" typeface="Gautami"/>
-        <a:font script="Taml" typeface="Latha"/>
-        <a:font script="Syrc" typeface="Estrangelo Edessa"/>
-        <a:font script="Orya" typeface="Kalinga"/>
-        <a:font script="Mlym" typeface="Kartika"/>
-        <a:font script="Laoo" typeface="DokChampa"/>
-        <a:font script="Sinh" typeface="Iskoola Pota"/>
-        <a:font script="Mong" typeface="Mongolian Baiti"/>
-        <a:font script="Viet" typeface="Times New Roman"/>
-        <a:font script="Uigh" typeface="Microsoft Uighur"/>
-        <a:font script="Geor" typeface="Sylfaen"/>
-        <a:font script="Armn" typeface="Arial"/>
-        <a:font script="Bugi" typeface="Leelawadee UI"/>
-        <a:font script="Bopo" typeface="Microsoft JhengHei"/>
-        <a:font script="Java" typeface="Javanese Text"/>
-        <a:font script="Lisu" typeface="Segoe UI"/>
-        <a:font script="Mymr" typeface="Myanmar Text"/>
-        <a:font script="Nkoo" typeface="Ebrima"/>
-        <a:font script="Olck" typeface="Nirmala UI"/>
-        <a:font script="Osma" typeface="Ebrima"/>
-        <a:font script="Phag" typeface="Phagspa"/>
-        <a:font script="Syrn" typeface="Estrangelo Edessa"/>
-        <a:font script="Syrj" typeface="Estrangelo Edessa"/>
-        <a:font script="Syre" typeface="Estrangelo Edessa"/>
-        <a:font script="Sora" typeface="Nirmala UI"/>
-        <a:font script="Tale" typeface="Microsoft Tai Le"/>
-        <a:font script="Talu" typeface="Microsoft New Tai Lue"/>
-        <a:font script="Tfng" typeface="Ebrima"/>
-      </a:majorFont>
-      <a:minorFont>
-        <a:latin typeface="Aptos" panose="02110004020202020204"/>
-        <a:ea typeface=""/>
-        <a:cs typeface=""/>
-        <a:font script="Jpan" typeface="游ゴシック"/>
-        <a:font script="Hang" typeface="맑은 고딕"/>
-        <a:font script="Hans" typeface="等线"/>
-        <a:font script="Hant" typeface="新細明體"/>
-        <a:font script="Arab" typeface="Arial"/>
-        <a:font script="Hebr" typeface="Arial"/>
-        <a:font script="Thai" typeface="Cordia New"/>
+        <a:font script="Jpan" typeface="ＭＳ ゴシック"/>
+        <a:font script="Hang" typeface="HY중고딕"/>
+        <a:font script="Hans" typeface="幼圆"/>
+        <a:font script="Hant" typeface="微軟正黑體"/>
+        <a:font script="Arab" typeface="Tahoma"/>
+        <a:font script="Hebr" typeface="Gisha"/>
+        <a:font script="Thai" typeface="DilleniaUPC"/>
         <a:font script="Ethi" typeface="Nyala"/>
         <a:font script="Beng" typeface="Vrinda"/>
         <a:font script="Gujr" typeface="Shruti"/>
@@ -5380,107 +5383,85 @@
         <a:font script="Laoo" typeface="DokChampa"/>
         <a:font script="Sinh" typeface="Iskoola Pota"/>
         <a:font script="Mong" typeface="Mongolian Baiti"/>
-        <a:font script="Viet" typeface="Arial"/>
+        <a:font script="Viet" typeface="Tahoma"/>
         <a:font script="Uigh" typeface="Microsoft Uighur"/>
         <a:font script="Geor" typeface="Sylfaen"/>
-        <a:font script="Armn" typeface="Arial"/>
-        <a:font script="Bugi" typeface="Leelawadee UI"/>
-        <a:font script="Bopo" typeface="Microsoft JhengHei"/>
-        <a:font script="Java" typeface="Javanese Text"/>
-        <a:font script="Lisu" typeface="Segoe UI"/>
-        <a:font script="Mymr" typeface="Myanmar Text"/>
-        <a:font script="Nkoo" typeface="Ebrima"/>
-        <a:font script="Olck" typeface="Nirmala UI"/>
-        <a:font script="Osma" typeface="Ebrima"/>
-        <a:font script="Phag" typeface="Phagspa"/>
-        <a:font script="Syrn" typeface="Estrangelo Edessa"/>
-        <a:font script="Syrj" typeface="Estrangelo Edessa"/>
-        <a:font script="Syre" typeface="Estrangelo Edessa"/>
-        <a:font script="Sora" typeface="Nirmala UI"/>
-        <a:font script="Tale" typeface="Microsoft Tai Le"/>
-        <a:font script="Talu" typeface="Microsoft New Tai Lue"/>
-        <a:font script="Tfng" typeface="Ebrima"/>
+      </a:majorFont>
+      <a:minorFont>
+        <a:latin typeface="Corbel" panose="020B0503020204020204"/>
+        <a:ea typeface=""/>
+        <a:cs typeface=""/>
+        <a:font script="Jpan" typeface="ＭＳ ゴシック"/>
+        <a:font script="Hang" typeface="HY중고딕"/>
+        <a:font script="Hans" typeface="幼圆"/>
+        <a:font script="Hant" typeface="微軟正黑體"/>
+        <a:font script="Arab" typeface="Tahoma"/>
+        <a:font script="Hebr" typeface="Gisha"/>
+        <a:font script="Thai" typeface="DilleniaUPC"/>
+        <a:font script="Ethi" typeface="Nyala"/>
+        <a:font script="Beng" typeface="Vrinda"/>
+        <a:font script="Gujr" typeface="Shruti"/>
+        <a:font script="Khmr" typeface="DaunPenh"/>
+        <a:font script="Knda" typeface="Tunga"/>
+        <a:font script="Guru" typeface="Raavi"/>
+        <a:font script="Cans" typeface="Euphemia"/>
+        <a:font script="Cher" typeface="Plantagenet Cherokee"/>
+        <a:font script="Yiii" typeface="Microsoft Yi Baiti"/>
+        <a:font script="Tibt" typeface="Microsoft Himalaya"/>
+        <a:font script="Thaa" typeface="MV Boli"/>
+        <a:font script="Deva" typeface="Mangal"/>
+        <a:font script="Telu" typeface="Gautami"/>
+        <a:font script="Taml" typeface="Latha"/>
+        <a:font script="Syrc" typeface="Estrangelo Edessa"/>
+        <a:font script="Orya" typeface="Kalinga"/>
+        <a:font script="Mlym" typeface="Kartika"/>
+        <a:font script="Laoo" typeface="DokChampa"/>
+        <a:font script="Sinh" typeface="Iskoola Pota"/>
+        <a:font script="Mong" typeface="Mongolian Baiti"/>
+        <a:font script="Viet" typeface="Verdana"/>
+        <a:font script="Uigh" typeface="Microsoft Uighur"/>
+        <a:font script="Geor" typeface="Sylfaen"/>
       </a:minorFont>
     </a:fontScheme>
-    <a:fmtScheme name="Office">
+    <a:fmtScheme name="Frame">
       <a:fillStyleLst>
         <a:solidFill>
           <a:schemeClr val="phClr"/>
         </a:solidFill>
-        <a:gradFill rotWithShape="1">
-          <a:gsLst>
-            <a:gs pos="0">
-              <a:schemeClr val="phClr">
-                <a:lumMod val="110000"/>
-                <a:satMod val="105000"/>
-                <a:tint val="67000"/>
-              </a:schemeClr>
-            </a:gs>
-            <a:gs pos="50000">
-              <a:schemeClr val="phClr">
-                <a:lumMod val="105000"/>
-                <a:satMod val="103000"/>
-                <a:tint val="73000"/>
-              </a:schemeClr>
-            </a:gs>
-            <a:gs pos="100000">
-              <a:schemeClr val="phClr">
-                <a:lumMod val="105000"/>
-                <a:satMod val="109000"/>
-                <a:tint val="81000"/>
-              </a:schemeClr>
-            </a:gs>
-          </a:gsLst>
-          <a:lin ang="5400000" scaled="0"/>
-        </a:gradFill>
-        <a:gradFill rotWithShape="1">
-          <a:gsLst>
-            <a:gs pos="0">
-              <a:schemeClr val="phClr">
-                <a:satMod val="103000"/>
-                <a:lumMod val="102000"/>
-                <a:tint val="94000"/>
-              </a:schemeClr>
-            </a:gs>
-            <a:gs pos="50000">
-              <a:schemeClr val="phClr">
-                <a:satMod val="110000"/>
-                <a:lumMod val="100000"/>
-                <a:shade val="100000"/>
-              </a:schemeClr>
-            </a:gs>
-            <a:gs pos="100000">
-              <a:schemeClr val="phClr">
-                <a:lumMod val="99000"/>
-                <a:satMod val="120000"/>
-                <a:shade val="78000"/>
-              </a:schemeClr>
-            </a:gs>
-          </a:gsLst>
-          <a:lin ang="5400000" scaled="0"/>
-        </a:gradFill>
+        <a:solidFill>
+          <a:schemeClr val="phClr">
+            <a:tint val="65000"/>
+          </a:schemeClr>
+        </a:solidFill>
+        <a:solidFill>
+          <a:schemeClr val="phClr">
+            <a:shade val="80000"/>
+            <a:satMod val="150000"/>
+          </a:schemeClr>
+        </a:solidFill>
       </a:fillStyleLst>
       <a:lnStyleLst>
-        <a:ln w="12700" cap="flat" cmpd="sng" algn="ctr">
+        <a:ln w="9525" cap="flat" cmpd="sng" algn="ctr">
           <a:solidFill>
             <a:schemeClr val="phClr"/>
           </a:solidFill>
           <a:prstDash val="solid"/>
-          <a:miter lim="800000"/>
         </a:ln>
-        <a:ln w="19050" cap="flat" cmpd="sng" algn="ctr">
+        <a:ln w="10795" cap="flat" cmpd="sng" algn="ctr">
           <a:solidFill>
             <a:schemeClr val="phClr"/>
           </a:solidFill>
           <a:prstDash val="solid"/>
-          <a:miter lim="800000"/>
         </a:ln>
-        <a:ln w="25400" cap="flat" cmpd="sng" algn="ctr">
+        <a:ln w="17145" cap="flat" cmpd="sng" algn="ctr">
           <a:solidFill>
-            <a:schemeClr val="phClr"/>
+            <a:schemeClr val="phClr">
+              <a:shade val="95000"/>
+              <a:alpha val="50000"/>
+              <a:satMod val="150000"/>
+            </a:schemeClr>
           </a:solidFill>
           <a:prstDash val="solid"/>
-          <a:miter lim="800000"/>
         </a:ln>
       </a:lnStyleLst>
       <a:effectStyleLst>
@@ -5492,12 +5473,21 @@
         </a:effectStyle>
         <a:effectStyle>
           <a:effectLst>
-            <a:outerShdw blurRad="57150" dist="19050" dir="5400000" algn="ctr" rotWithShape="0">
+            <a:outerShdw blurRad="44450" dist="13970" dir="5400000" algn="ctr" rotWithShape="0">
               <a:srgbClr val="000000">
-                <a:alpha val="63000"/>
+                <a:alpha val="45000"/>
               </a:srgbClr>
             </a:outerShdw>
           </a:effectLst>
+          <a:scene3d>
+            <a:camera prst="orthographicFront">
+              <a:rot lat="0" lon="0" rev="0"/>
+            </a:camera>
+            <a:lightRig rig="twoPt" dir="tl"/>
+          </a:scene3d>
+          <a:sp3d prstMaterial="flat">
+            <a:bevelT w="12700" h="25400" prst="coolSlant"/>
+          </a:sp3d>
         </a:effectStyle>
       </a:effectStyleLst>
       <a:bgFillStyleLst>
@@ -5515,23 +5505,24 @@
             <a:gs pos="0">
               <a:schemeClr val="phClr">
                 <a:tint val="93000"/>
-                <a:satMod val="150000"/>
                 <a:shade val="98000"/>
+                <a:satMod val="120000"/>
                 <a:lumMod val="102000"/>
               </a:schemeClr>
             </a:gs>
-            <a:gs pos="50000">
+            <a:gs pos="48000">
               <a:schemeClr val="phClr">
                 <a:tint val="98000"/>
-                <a:satMod val="130000"/>
                 <a:shade val="90000"/>
+                <a:satMod val="110000"/>
                 <a:lumMod val="103000"/>
               </a:schemeClr>
             </a:gs>
             <a:gs pos="100000">
               <a:schemeClr val="phClr">
-                <a:shade val="63000"/>
-                <a:satMod val="120000"/>
+                <a:tint val="98000"/>
+                <a:shade val="80000"/>
+                <a:satMod val="100000"/>
               </a:schemeClr>
             </a:gs>
           </a:gsLst>
@@ -5540,31 +5531,11 @@
       </a:bgFillStyleLst>
     </a:fmtScheme>
   </a:themeElements>
-  <a:objectDefaults>
-    <a:lnDef>
-      <a:spPr/>
-      <a:bodyPr/>
-      <a:lstStyle/>
-      <a:style>
-        <a:lnRef idx="2">
-          <a:schemeClr val="accent1"/>
-        </a:lnRef>
-        <a:fillRef idx="0">
-          <a:schemeClr val="accent1"/>
-        </a:fillRef>
-        <a:effectRef idx="1">
-          <a:schemeClr val="accent1"/>
-        </a:effectRef>
-        <a:fontRef idx="minor">
-          <a:schemeClr val="tx1"/>
-        </a:fontRef>
-      </a:style>
-    </a:lnDef>
-  </a:objectDefaults>
+  <a:objectDefaults/>
   <a:extraClrSchemeLst/>
   <a:extLst>
     <a:ext uri="{05A4C25C-085E-4340-85A3-A5531E510DB2}">
-      <thm15:themeFamily xmlns:thm15="http://schemas.microsoft.com/office/thememl/2012/main" name="Office Theme" id="{2E142A2C-CD16-42D6-873A-C26D2A0506FA}" vid="{1BDDFF52-6CD6-40A5-AB3C-68EB2F1E4D0A}"/>
+      <thm15:themeFamily xmlns:thm15="http://schemas.microsoft.com/office/thememl/2012/main" name="Frame" id="{F226E7A2-7162-461C-9490-D27D9DC04E43}" vid="{629A0216-3BBD-45C0-B63F-2683BEA18F60}"/>
     </a:ext>
   </a:extLst>
 </a:theme>

--- a/Zeroth review- Voice AI.pptx
+++ b/Zeroth review- Voice AI.pptx
@@ -9,13 +9,12 @@
     <p:sldId id="261" r:id="rId3"/>
     <p:sldId id="257" r:id="rId4"/>
     <p:sldId id="263" r:id="rId5"/>
-    <p:sldId id="264" r:id="rId6"/>
-    <p:sldId id="265" r:id="rId7"/>
-    <p:sldId id="266" r:id="rId8"/>
-    <p:sldId id="262" r:id="rId9"/>
-    <p:sldId id="258" r:id="rId10"/>
-    <p:sldId id="259" r:id="rId11"/>
-    <p:sldId id="260" r:id="rId12"/>
+    <p:sldId id="265" r:id="rId6"/>
+    <p:sldId id="266" r:id="rId7"/>
+    <p:sldId id="262" r:id="rId8"/>
+    <p:sldId id="258" r:id="rId9"/>
+    <p:sldId id="259" r:id="rId10"/>
+    <p:sldId id="260" r:id="rId11"/>
   </p:sldIdLst>
   <p:sldSz cx="12192000" cy="6858000"/>
   <p:notesSz cx="6858000" cy="9144000"/>
@@ -404,6 +403,13 @@
             <a:schemeClr val="lt1"/>
           </a:fontRef>
         </p:style>
+        <p:txBody>
+          <a:bodyPr/>
+          <a:lstStyle/>
+          <a:p>
+            <a:endParaRPr lang="en-IN"/>
+          </a:p>
+        </p:txBody>
       </p:sp>
       <p:sp>
         <p:nvSpPr>
@@ -444,6 +450,13 @@
             <a:schemeClr val="lt1"/>
           </a:fontRef>
         </p:style>
+        <p:txBody>
+          <a:bodyPr/>
+          <a:lstStyle/>
+          <a:p>
+            <a:endParaRPr lang="en-IN"/>
+          </a:p>
+        </p:txBody>
       </p:sp>
       <p:sp>
         <p:nvSpPr>
@@ -2981,6 +2994,13 @@
             <a:schemeClr val="lt1"/>
           </a:fontRef>
         </p:style>
+        <p:txBody>
+          <a:bodyPr/>
+          <a:lstStyle/>
+          <a:p>
+            <a:endParaRPr lang="en-IN"/>
+          </a:p>
+        </p:txBody>
       </p:sp>
       <p:sp>
         <p:nvSpPr>
@@ -3054,6 +3074,13 @@
             <a:schemeClr val="lt1"/>
           </a:fontRef>
         </p:style>
+        <p:txBody>
+          <a:bodyPr/>
+          <a:lstStyle/>
+          <a:p>
+            <a:endParaRPr lang="en-IN"/>
+          </a:p>
+        </p:txBody>
       </p:sp>
       <p:sp>
         <p:nvSpPr>
@@ -3626,6 +3653,14 @@
 <file path=ppt/slides/slide1.xml><?xml version="1.0" encoding="utf-8"?>
 <p:sld xmlns:a="http://schemas.openxmlformats.org/drawingml/2006/main" xmlns:r="http://schemas.openxmlformats.org/officeDocument/2006/relationships" xmlns:p="http://schemas.openxmlformats.org/presentationml/2006/main">
   <p:cSld>
+    <p:bg>
+      <p:bgPr>
+        <a:solidFill>
+          <a:schemeClr val="bg1"/>
+        </a:solidFill>
+        <a:effectLst/>
+      </p:bgPr>
+    </p:bg>
     <p:spTree>
       <p:nvGrpSpPr>
         <p:cNvPr id="1" name=""/>
@@ -3640,6 +3675,66 @@
           <a:chExt cx="0" cy="0"/>
         </a:xfrm>
       </p:grpSpPr>
+      <p:sp useBgFill="1">
+        <p:nvSpPr>
+          <p:cNvPr id="8" name="Rectangle 7">
+            <a:extLst>
+              <a:ext uri="{FF2B5EF4-FFF2-40B4-BE49-F238E27FC236}">
+                <a16:creationId xmlns:a16="http://schemas.microsoft.com/office/drawing/2014/main" id="{B4B5CC49-6FAE-42FA-99B6-A3FDA8C68848}"/>
+              </a:ext>
+              <a:ext uri="{C183D7F6-B498-43B3-948B-1728B52AA6E4}">
+                <adec:decorative xmlns:adec="http://schemas.microsoft.com/office/drawing/2017/decorative" val="1"/>
+              </a:ext>
+            </a:extLst>
+          </p:cNvPr>
+          <p:cNvSpPr>
+            <a:spLocks noGrp="1" noRot="1" noChangeAspect="1" noMove="1" noResize="1" noEditPoints="1" noAdjustHandles="1" noChangeArrowheads="1" noChangeShapeType="1" noTextEdit="1"/>
+          </p:cNvSpPr>
+          <p:nvPr>
+            <p:extLst>
+              <p:ext uri="{386F3935-93C4-4BCD-93E2-E3B085C9AB24}">
+                <p16:designElem xmlns:p16="http://schemas.microsoft.com/office/powerpoint/2015/main" val="1"/>
+              </p:ext>
+            </p:extLst>
+          </p:nvPr>
+        </p:nvSpPr>
+        <p:spPr>
+          <a:xfrm>
+            <a:off x="0" y="0"/>
+            <a:ext cx="12192000" cy="6858000"/>
+          </a:xfrm>
+          <a:prstGeom prst="rect">
+            <a:avLst/>
+          </a:prstGeom>
+          <a:ln>
+            <a:noFill/>
+          </a:ln>
+        </p:spPr>
+        <p:style>
+          <a:lnRef idx="2">
+            <a:schemeClr val="accent1">
+              <a:shade val="50000"/>
+            </a:schemeClr>
+          </a:lnRef>
+          <a:fillRef idx="1">
+            <a:schemeClr val="accent1"/>
+          </a:fillRef>
+          <a:effectRef idx="0">
+            <a:schemeClr val="accent1"/>
+          </a:effectRef>
+          <a:fontRef idx="minor">
+            <a:schemeClr val="lt1"/>
+          </a:fontRef>
+        </p:style>
+        <p:txBody>
+          <a:bodyPr rtlCol="0" anchor="ctr"/>
+          <a:lstStyle/>
+          <a:p>
+            <a:pPr algn="ctr"/>
+            <a:endParaRPr lang="en-US" dirty="0"/>
+          </a:p>
+        </p:txBody>
+      </p:sp>
       <p:sp>
         <p:nvSpPr>
           <p:cNvPr id="2" name="Title 1">
@@ -3656,16 +3751,38 @@
             <p:ph type="ctrTitle"/>
           </p:nvPr>
         </p:nvSpPr>
-        <p:spPr/>
-        <p:txBody>
-          <a:bodyPr/>
-          <a:lstStyle/>
-          <a:p>
-            <a:r>
-              <a:rPr lang="en-US" dirty="0"/>
+        <p:spPr>
+          <a:xfrm>
+            <a:off x="1703295" y="1083732"/>
+            <a:ext cx="5509628" cy="4690534"/>
+          </a:xfrm>
+        </p:spPr>
+        <p:txBody>
+          <a:bodyPr anchor="ctr">
+            <a:normAutofit/>
+          </a:bodyPr>
+          <a:lstStyle/>
+          <a:p>
+            <a:pPr algn="r"/>
+            <a:r>
+              <a:rPr lang="en-US" sz="7200">
+                <a:solidFill>
+                  <a:schemeClr val="tx1">
+                    <a:lumMod val="75000"/>
+                    <a:lumOff val="25000"/>
+                  </a:schemeClr>
+                </a:solidFill>
+              </a:rPr>
               <a:t>Real-Time Voice AI Agent for Banking Support</a:t>
             </a:r>
-            <a:endParaRPr lang="en-IN" dirty="0"/>
+            <a:endParaRPr lang="en-IN" sz="7200">
+              <a:solidFill>
+                <a:schemeClr val="tx1">
+                  <a:lumMod val="75000"/>
+                  <a:lumOff val="25000"/>
+                </a:schemeClr>
+              </a:solidFill>
+            </a:endParaRPr>
           </a:p>
         </p:txBody>
       </p:sp>
@@ -3685,12 +3802,245 @@
             <p:ph type="subTitle" idx="1"/>
           </p:nvPr>
         </p:nvSpPr>
-        <p:spPr/>
+        <p:spPr>
+          <a:xfrm>
+            <a:off x="7856389" y="1083732"/>
+            <a:ext cx="3507654" cy="4690534"/>
+          </a:xfrm>
+        </p:spPr>
+        <p:txBody>
+          <a:bodyPr anchor="ctr">
+            <a:normAutofit/>
+          </a:bodyPr>
+          <a:lstStyle/>
+          <a:p>
+            <a:r>
+              <a:rPr lang="en-GB" sz="2800" dirty="0">
+                <a:solidFill>
+                  <a:schemeClr val="tx1">
+                    <a:lumMod val="75000"/>
+                    <a:lumOff val="25000"/>
+                  </a:schemeClr>
+                </a:solidFill>
+              </a:rPr>
+              <a:t>By: Aryan Arora</a:t>
+            </a:r>
+          </a:p>
+          <a:p>
+            <a:r>
+              <a:rPr lang="en-GB" sz="2800" dirty="0">
+                <a:solidFill>
+                  <a:schemeClr val="tx1">
+                    <a:lumMod val="75000"/>
+                    <a:lumOff val="25000"/>
+                  </a:schemeClr>
+                </a:solidFill>
+              </a:rPr>
+              <a:t>VIT Chennai</a:t>
+            </a:r>
+          </a:p>
+          <a:p>
+            <a:r>
+              <a:rPr lang="en-GB" sz="2800" dirty="0">
+                <a:solidFill>
+                  <a:schemeClr val="tx1">
+                    <a:lumMod val="75000"/>
+                    <a:lumOff val="25000"/>
+                  </a:schemeClr>
+                </a:solidFill>
+              </a:rPr>
+              <a:t>DS &amp; AI</a:t>
+            </a:r>
+            <a:endParaRPr lang="en-IN" sz="2800" dirty="0">
+              <a:solidFill>
+                <a:schemeClr val="tx1">
+                  <a:lumMod val="75000"/>
+                  <a:lumOff val="25000"/>
+                </a:schemeClr>
+              </a:solidFill>
+            </a:endParaRPr>
+          </a:p>
+        </p:txBody>
+      </p:sp>
+      <p:sp>
+        <p:nvSpPr>
+          <p:cNvPr id="10" name="Rectangle 9">
+            <a:extLst>
+              <a:ext uri="{FF2B5EF4-FFF2-40B4-BE49-F238E27FC236}">
+                <a16:creationId xmlns:a16="http://schemas.microsoft.com/office/drawing/2014/main" id="{E6BC9B4A-2119-4645-B4CA-7817D5FAF4B6}"/>
+              </a:ext>
+              <a:ext uri="{C183D7F6-B498-43B3-948B-1728B52AA6E4}">
+                <adec:decorative xmlns:adec="http://schemas.microsoft.com/office/drawing/2017/decorative" val="1"/>
+              </a:ext>
+            </a:extLst>
+          </p:cNvPr>
+          <p:cNvSpPr>
+            <a:spLocks noGrp="1" noRot="1" noChangeAspect="1" noMove="1" noResize="1" noEditPoints="1" noAdjustHandles="1" noChangeArrowheads="1" noChangeShapeType="1" noTextEdit="1"/>
+          </p:cNvSpPr>
+          <p:nvPr>
+            <p:extLst>
+              <p:ext uri="{386F3935-93C4-4BCD-93E2-E3B085C9AB24}">
+                <p16:designElem xmlns:p16="http://schemas.microsoft.com/office/powerpoint/2015/main" val="1"/>
+              </p:ext>
+            </p:extLst>
+          </p:nvPr>
+        </p:nvSpPr>
+        <p:spPr>
+          <a:xfrm>
+            <a:off x="0" y="761999"/>
+            <a:ext cx="1286934" cy="5334001"/>
+          </a:xfrm>
+          <a:prstGeom prst="rect">
+            <a:avLst/>
+          </a:prstGeom>
+          <a:solidFill>
+            <a:schemeClr val="accent1"/>
+          </a:solidFill>
+          <a:ln>
+            <a:noFill/>
+          </a:ln>
+        </p:spPr>
+        <p:style>
+          <a:lnRef idx="2">
+            <a:schemeClr val="accent1">
+              <a:shade val="50000"/>
+            </a:schemeClr>
+          </a:lnRef>
+          <a:fillRef idx="1">
+            <a:schemeClr val="accent1"/>
+          </a:fillRef>
+          <a:effectRef idx="0">
+            <a:schemeClr val="accent1"/>
+          </a:effectRef>
+          <a:fontRef idx="minor">
+            <a:schemeClr val="lt1"/>
+          </a:fontRef>
+        </p:style>
         <p:txBody>
           <a:bodyPr/>
           <a:lstStyle/>
           <a:p>
             <a:endParaRPr lang="en-IN"/>
+          </a:p>
+        </p:txBody>
+      </p:sp>
+      <p:cxnSp>
+        <p:nvCxnSpPr>
+          <p:cNvPr id="12" name="Straight Connector 11">
+            <a:extLst>
+              <a:ext uri="{FF2B5EF4-FFF2-40B4-BE49-F238E27FC236}">
+                <a16:creationId xmlns:a16="http://schemas.microsoft.com/office/drawing/2014/main" id="{158D888F-D87A-4C3C-BD82-273E4C8C5E83}"/>
+              </a:ext>
+              <a:ext uri="{C183D7F6-B498-43B3-948B-1728B52AA6E4}">
+                <adec:decorative xmlns:adec="http://schemas.microsoft.com/office/drawing/2017/decorative" val="1"/>
+              </a:ext>
+            </a:extLst>
+          </p:cNvPr>
+          <p:cNvCxnSpPr>
+            <a:cxnSpLocks noGrp="1" noRot="1" noChangeAspect="1" noMove="1" noResize="1" noEditPoints="1" noAdjustHandles="1" noChangeArrowheads="1" noChangeShapeType="1"/>
+          </p:cNvCxnSpPr>
+          <p:nvPr>
+            <p:extLst>
+              <p:ext uri="{386F3935-93C4-4BCD-93E2-E3B085C9AB24}">
+                <p16:designElem xmlns:p16="http://schemas.microsoft.com/office/powerpoint/2015/main" val="1"/>
+              </p:ext>
+            </p:extLst>
+          </p:nvPr>
+        </p:nvCxnSpPr>
+        <p:spPr>
+          <a:xfrm>
+            <a:off x="7534656" y="2085681"/>
+            <a:ext cx="0" cy="2686639"/>
+          </a:xfrm>
+          <a:prstGeom prst="line">
+            <a:avLst/>
+          </a:prstGeom>
+          <a:ln w="12700">
+            <a:solidFill>
+              <a:schemeClr val="tx1">
+                <a:lumMod val="50000"/>
+                <a:lumOff val="50000"/>
+              </a:schemeClr>
+            </a:solidFill>
+          </a:ln>
+        </p:spPr>
+        <p:style>
+          <a:lnRef idx="1">
+            <a:schemeClr val="accent1"/>
+          </a:lnRef>
+          <a:fillRef idx="0">
+            <a:schemeClr val="accent1"/>
+          </a:fillRef>
+          <a:effectRef idx="0">
+            <a:schemeClr val="accent1"/>
+          </a:effectRef>
+          <a:fontRef idx="minor">
+            <a:schemeClr val="tx1"/>
+          </a:fontRef>
+        </p:style>
+      </p:cxnSp>
+      <p:sp>
+        <p:nvSpPr>
+          <p:cNvPr id="14" name="Rectangle 13">
+            <a:extLst>
+              <a:ext uri="{FF2B5EF4-FFF2-40B4-BE49-F238E27FC236}">
+                <a16:creationId xmlns:a16="http://schemas.microsoft.com/office/drawing/2014/main" id="{99A2CD81-3BB6-4ED6-A50F-DC14F37A95CF}"/>
+              </a:ext>
+              <a:ext uri="{C183D7F6-B498-43B3-948B-1728B52AA6E4}">
+                <adec:decorative xmlns:adec="http://schemas.microsoft.com/office/drawing/2017/decorative" val="1"/>
+              </a:ext>
+            </a:extLst>
+          </p:cNvPr>
+          <p:cNvSpPr>
+            <a:spLocks noGrp="1" noRot="1" noChangeAspect="1" noMove="1" noResize="1" noEditPoints="1" noAdjustHandles="1" noChangeArrowheads="1" noChangeShapeType="1" noTextEdit="1"/>
+          </p:cNvSpPr>
+          <p:nvPr>
+            <p:extLst>
+              <p:ext uri="{386F3935-93C4-4BCD-93E2-E3B085C9AB24}">
+                <p16:designElem xmlns:p16="http://schemas.microsoft.com/office/powerpoint/2015/main" val="1"/>
+              </p:ext>
+            </p:extLst>
+          </p:nvPr>
+        </p:nvSpPr>
+        <p:spPr>
+          <a:xfrm>
+            <a:off x="11685778" y="767825"/>
+            <a:ext cx="508012" cy="5328173"/>
+          </a:xfrm>
+          <a:prstGeom prst="rect">
+            <a:avLst/>
+          </a:prstGeom>
+          <a:solidFill>
+            <a:srgbClr val="C8C8C8">
+              <a:alpha val="50000"/>
+            </a:srgbClr>
+          </a:solidFill>
+          <a:ln>
+            <a:noFill/>
+          </a:ln>
+        </p:spPr>
+        <p:style>
+          <a:lnRef idx="2">
+            <a:schemeClr val="accent1">
+              <a:shade val="50000"/>
+            </a:schemeClr>
+          </a:lnRef>
+          <a:fillRef idx="1">
+            <a:schemeClr val="accent1"/>
+          </a:fillRef>
+          <a:effectRef idx="0">
+            <a:schemeClr val="accent1"/>
+          </a:effectRef>
+          <a:fontRef idx="minor">
+            <a:schemeClr val="lt1"/>
+          </a:fontRef>
+        </p:style>
+        <p:txBody>
+          <a:bodyPr rtlCol="0" anchor="ctr"/>
+          <a:lstStyle/>
+          <a:p>
+            <a:pPr algn="ctr"/>
+            <a:endParaRPr lang="en-US"/>
           </a:p>
         </p:txBody>
       </p:sp>
@@ -3708,163 +4058,6 @@
 </file>
 
 <file path=ppt/slides/slide10.xml><?xml version="1.0" encoding="utf-8"?>
-<p:sld xmlns:a="http://schemas.openxmlformats.org/drawingml/2006/main" xmlns:r="http://schemas.openxmlformats.org/officeDocument/2006/relationships" xmlns:p="http://schemas.openxmlformats.org/presentationml/2006/main">
-  <p:cSld>
-    <p:spTree>
-      <p:nvGrpSpPr>
-        <p:cNvPr id="1" name="">
-          <a:extLst>
-            <a:ext uri="{FF2B5EF4-FFF2-40B4-BE49-F238E27FC236}">
-              <a16:creationId xmlns:a16="http://schemas.microsoft.com/office/drawing/2014/main" id="{A4EF664E-6C7F-ED31-C5F2-AC6154D413CF}"/>
-            </a:ext>
-          </a:extLst>
-        </p:cNvPr>
-        <p:cNvGrpSpPr/>
-        <p:nvPr/>
-      </p:nvGrpSpPr>
-      <p:grpSpPr>
-        <a:xfrm>
-          <a:off x="0" y="0"/>
-          <a:ext cx="0" cy="0"/>
-          <a:chOff x="0" y="0"/>
-          <a:chExt cx="0" cy="0"/>
-        </a:xfrm>
-      </p:grpSpPr>
-      <p:sp>
-        <p:nvSpPr>
-          <p:cNvPr id="2" name="Title 1">
-            <a:extLst>
-              <a:ext uri="{FF2B5EF4-FFF2-40B4-BE49-F238E27FC236}">
-                <a16:creationId xmlns:a16="http://schemas.microsoft.com/office/drawing/2014/main" id="{6EE74CBD-3BCE-AB1C-B7A0-55AF34786CB8}"/>
-              </a:ext>
-            </a:extLst>
-          </p:cNvPr>
-          <p:cNvSpPr>
-            <a:spLocks noGrp="1"/>
-          </p:cNvSpPr>
-          <p:nvPr>
-            <p:ph type="title"/>
-          </p:nvPr>
-        </p:nvSpPr>
-        <p:spPr/>
-        <p:txBody>
-          <a:bodyPr/>
-          <a:lstStyle/>
-          <a:p>
-            <a:endParaRPr lang="en-IN"/>
-          </a:p>
-        </p:txBody>
-      </p:sp>
-      <p:sp>
-        <p:nvSpPr>
-          <p:cNvPr id="3" name="Content Placeholder 2">
-            <a:extLst>
-              <a:ext uri="{FF2B5EF4-FFF2-40B4-BE49-F238E27FC236}">
-                <a16:creationId xmlns:a16="http://schemas.microsoft.com/office/drawing/2014/main" id="{85BBED03-0DBC-E411-C1AF-CE18EC85272F}"/>
-              </a:ext>
-            </a:extLst>
-          </p:cNvPr>
-          <p:cNvSpPr>
-            <a:spLocks noGrp="1"/>
-          </p:cNvSpPr>
-          <p:nvPr>
-            <p:ph idx="1"/>
-          </p:nvPr>
-        </p:nvSpPr>
-        <p:spPr/>
-        <p:txBody>
-          <a:bodyPr>
-            <a:normAutofit/>
-          </a:bodyPr>
-          <a:lstStyle/>
-          <a:p>
-            <a:r>
-              <a:rPr lang="en-IN" dirty="0"/>
-              <a:t>Anand, L. G. (2025). From Voice to Value: The Expanding Role of AI in Communication and Financial Services.</a:t>
-            </a:r>
-          </a:p>
-          <a:p>
-            <a:r>
-              <a:rPr lang="en-IN" dirty="0" err="1"/>
-              <a:t>Chitraju</a:t>
-            </a:r>
-            <a:r>
-              <a:rPr lang="en-IN" dirty="0"/>
-              <a:t>, S. (2025). Smart Systems, Smarter Decisions: AI Applications in Voice Recognition, User Support, and Financial Services. </a:t>
-            </a:r>
-            <a:r>
-              <a:rPr lang="en-IN" i="1" dirty="0"/>
-              <a:t>Smarter Decisions: AI Applications in Voice Recognition, User Support, and Financial Services (August 18, 2025)</a:t>
-            </a:r>
-            <a:r>
-              <a:rPr lang="en-IN" dirty="0"/>
-              <a:t>.</a:t>
-            </a:r>
-          </a:p>
-          <a:p>
-            <a:r>
-              <a:rPr lang="en-IN" dirty="0" err="1"/>
-              <a:t>Henkens</a:t>
-            </a:r>
-            <a:r>
-              <a:rPr lang="en-IN" dirty="0"/>
-              <a:t>, B., Schultz, C. D., De Keyser, A., &amp; Mahr, D. (2026). The sound of progress: AI voice agents in service. </a:t>
-            </a:r>
-            <a:r>
-              <a:rPr lang="en-IN" i="1" dirty="0"/>
-              <a:t>Journal of Service Management</a:t>
-            </a:r>
-            <a:r>
-              <a:rPr lang="en-IN" dirty="0"/>
-              <a:t>, </a:t>
-            </a:r>
-            <a:r>
-              <a:rPr lang="en-IN" i="1" dirty="0"/>
-              <a:t>37</a:t>
-            </a:r>
-            <a:r>
-              <a:rPr lang="en-IN" dirty="0"/>
-              <a:t>(1), 1-32.</a:t>
-            </a:r>
-          </a:p>
-          <a:p>
-            <a:r>
-              <a:rPr lang="en-IN" dirty="0"/>
-              <a:t>Parthiban, E. S., &amp; Adil, M. (2023). Trends in the AI-based banking conversational agents literature: a bibliometric review. </a:t>
-            </a:r>
-            <a:r>
-              <a:rPr lang="en-IN" i="1" dirty="0"/>
-              <a:t>Asia pacific journal of information systems</a:t>
-            </a:r>
-            <a:r>
-              <a:rPr lang="en-IN" dirty="0"/>
-              <a:t>, </a:t>
-            </a:r>
-            <a:r>
-              <a:rPr lang="en-IN" i="1" dirty="0"/>
-              <a:t>33</a:t>
-            </a:r>
-            <a:r>
-              <a:rPr lang="en-IN" dirty="0"/>
-              <a:t>(3), 702-736.</a:t>
-            </a:r>
-          </a:p>
-        </p:txBody>
-      </p:sp>
-    </p:spTree>
-    <p:extLst>
-      <p:ext uri="{BB962C8B-B14F-4D97-AF65-F5344CB8AC3E}">
-        <p14:creationId xmlns:p14="http://schemas.microsoft.com/office/powerpoint/2010/main" val="52899601"/>
-      </p:ext>
-    </p:extLst>
-  </p:cSld>
-  <p:clrMapOvr>
-    <a:masterClrMapping/>
-  </p:clrMapOvr>
-</p:sld>
-</file>
-
-<file path=ppt/slides/slide11.xml><?xml version="1.0" encoding="utf-8"?>
 <p:sld xmlns:a="http://schemas.openxmlformats.org/drawingml/2006/main" xmlns:r="http://schemas.openxmlformats.org/officeDocument/2006/relationships" xmlns:p="http://schemas.openxmlformats.org/presentationml/2006/main">
   <p:cSld>
     <p:spTree>
@@ -4071,14 +4264,16 @@
         </p:nvSpPr>
         <p:spPr/>
         <p:txBody>
-          <a:bodyPr/>
-          <a:lstStyle/>
-          <a:p>
-            <a:r>
-              <a:rPr lang="en-US" dirty="0"/>
+          <a:bodyPr>
+            <a:normAutofit/>
+          </a:bodyPr>
+          <a:lstStyle/>
+          <a:p>
+            <a:r>
+              <a:rPr lang="en-US" sz="2400" dirty="0"/>
               <a:t>Indian private banks handle over 10 million support calls monthly with 6-plus minute average handle times and high IVR frustration, leading to poor CSAT scores and customer churn. Tier-1 queries such as balance checks, card blocks, and EMI schedules represent 60% of call volume but consume the same agent time as complex issues.</a:t>
             </a:r>
-            <a:endParaRPr lang="en-IN" dirty="0"/>
+            <a:endParaRPr lang="en-IN" sz="2400" dirty="0"/>
           </a:p>
         </p:txBody>
       </p:sp>
@@ -4165,18 +4360,18 @@
           <a:lstStyle/>
           <a:p>
             <a:r>
-              <a:rPr lang="en-US" dirty="0"/>
+              <a:rPr lang="en-US" sz="2400" dirty="0"/>
               <a:t>A real-time voice AI agent using </a:t>
             </a:r>
             <a:r>
-              <a:rPr lang="en-US" dirty="0" err="1"/>
+              <a:rPr lang="en-US" sz="2400" dirty="0" err="1"/>
               <a:t>Pipecat</a:t>
             </a:r>
             <a:r>
-              <a:rPr lang="en-US" dirty="0"/>
+              <a:rPr lang="en-US" sz="2400" dirty="0"/>
               <a:t> for call orchestration, faster-whisper for streaming speech-to-text, Coqui TTS for text-to-speech, and a RAG backend grounded on bank policy documents. The agent handles Tier-1 queries and escalates complex queries to human agents with full conversation context and entity summary.</a:t>
             </a:r>
-            <a:endParaRPr lang="en-IN" dirty="0"/>
+            <a:endParaRPr lang="en-IN" sz="2400" dirty="0"/>
           </a:p>
         </p:txBody>
       </p:sp>
@@ -4261,7 +4456,12 @@
             <p:ph idx="1"/>
           </p:nvPr>
         </p:nvSpPr>
-        <p:spPr/>
+        <p:spPr>
+          <a:xfrm>
+            <a:off x="3869268" y="419725"/>
+            <a:ext cx="7315200" cy="5981075"/>
+          </a:xfrm>
+        </p:spPr>
         <p:txBody>
           <a:bodyPr>
             <a:normAutofit/>
@@ -4269,34 +4469,46 @@
           <a:lstStyle/>
           <a:p>
             <a:r>
-              <a:rPr lang="en-US" dirty="0"/>
+              <a:rPr lang="en-US" sz="2400" dirty="0"/>
               <a:t>End-to-end voice pipeline: browser mic or Asterisk to faster-whisper STT to intent detection to RAG to Coqui TTS.</a:t>
             </a:r>
           </a:p>
           <a:p>
             <a:r>
-              <a:rPr lang="en-US" dirty="0"/>
+              <a:rPr lang="en-US" sz="2400" dirty="0"/>
               <a:t>RAG knowledge base over 500-plus bank FAQ PDFs, policy documents, and product sheets.</a:t>
             </a:r>
           </a:p>
           <a:p>
             <a:r>
-              <a:rPr lang="en-US" dirty="0"/>
+              <a:rPr lang="en-US" sz="2400" dirty="0"/>
               <a:t>Intent classifier for banking: balance, card block, EMI, NEFT, cheque, FD, and more.</a:t>
             </a:r>
           </a:p>
           <a:p>
             <a:r>
-              <a:rPr lang="en-IN" dirty="0"/>
+              <a:rPr lang="en-IN" sz="2400" dirty="0"/>
               <a:t>Seamless human escalation</a:t>
             </a:r>
           </a:p>
           <a:p>
             <a:r>
-              <a:rPr lang="en-US" dirty="0"/>
+              <a:rPr lang="en-US" sz="2400" dirty="0"/>
               <a:t>Call analytics dashboard: intent distribution, resolution rate, and average handle time</a:t>
             </a:r>
-            <a:endParaRPr lang="en-IN" dirty="0"/>
+          </a:p>
+          <a:p>
+            <a:r>
+              <a:rPr lang="en-US" sz="2400" dirty="0"/>
+              <a:t>DTMF keypad fallback for low-network conditions</a:t>
+            </a:r>
+          </a:p>
+          <a:p>
+            <a:r>
+              <a:rPr lang="en-US" sz="2400" dirty="0"/>
+              <a:t>WebSocket-based deployment with Redis session management</a:t>
+            </a:r>
+            <a:endParaRPr lang="en-IN" sz="2400" dirty="0"/>
           </a:p>
         </p:txBody>
       </p:sp>
@@ -4318,13 +4530,7 @@
   <p:cSld>
     <p:spTree>
       <p:nvGrpSpPr>
-        <p:cNvPr id="1" name="">
-          <a:extLst>
-            <a:ext uri="{FF2B5EF4-FFF2-40B4-BE49-F238E27FC236}">
-              <a16:creationId xmlns:a16="http://schemas.microsoft.com/office/drawing/2014/main" id="{03B5E0AA-CA16-4B09-B7A9-E838EAE83F27}"/>
-            </a:ext>
-          </a:extLst>
-        </p:cNvPr>
+        <p:cNvPr id="1" name=""/>
         <p:cNvGrpSpPr/>
         <p:nvPr/>
       </p:nvGrpSpPr>
@@ -4341,7 +4547,7 @@
           <p:cNvPr id="2" name="Title 1">
             <a:extLst>
               <a:ext uri="{FF2B5EF4-FFF2-40B4-BE49-F238E27FC236}">
-                <a16:creationId xmlns:a16="http://schemas.microsoft.com/office/drawing/2014/main" id="{AFF1E2F5-B829-778F-A471-44B1562BCC99}"/>
+                <a16:creationId xmlns:a16="http://schemas.microsoft.com/office/drawing/2014/main" id="{008EC106-2771-8066-4DD9-49DA5E5A541D}"/>
               </a:ext>
             </a:extLst>
           </p:cNvPr>
@@ -4359,7 +4565,7 @@
           <a:p>
             <a:r>
               <a:rPr lang="en-US" dirty="0"/>
-              <a:t>Objectives</a:t>
+              <a:t>Dataset</a:t>
             </a:r>
             <a:endParaRPr lang="en-IN" dirty="0"/>
           </a:p>
@@ -4370,7 +4576,7 @@
           <p:cNvPr id="3" name="Content Placeholder 2">
             <a:extLst>
               <a:ext uri="{FF2B5EF4-FFF2-40B4-BE49-F238E27FC236}">
-                <a16:creationId xmlns:a16="http://schemas.microsoft.com/office/drawing/2014/main" id="{795B2290-71D1-3099-EEEE-E5F617219C7A}"/>
+                <a16:creationId xmlns:a16="http://schemas.microsoft.com/office/drawing/2014/main" id="{90066223-E67F-DE1F-A9AA-FB1F9E4E7066}"/>
               </a:ext>
             </a:extLst>
           </p:cNvPr>
@@ -4389,23 +4595,27 @@
           <a:lstStyle/>
           <a:p>
             <a:r>
-              <a:rPr lang="en-US" dirty="0"/>
-              <a:t>DTMF keypad fallback for low-network conditions</a:t>
-            </a:r>
-          </a:p>
-          <a:p>
-            <a:r>
-              <a:rPr lang="en-US" dirty="0"/>
-              <a:t>WebSocket-based deployment with Redis session management</a:t>
-            </a:r>
-            <a:endParaRPr lang="en-IN" dirty="0"/>
+              <a:rPr lang="en-US" sz="2400" dirty="0"/>
+              <a:t>Due to r</a:t>
+            </a:r>
+            <a:r>
+              <a:rPr lang="en-IN" sz="2400" dirty="0" err="1"/>
+              <a:t>eal</a:t>
+            </a:r>
+            <a:r>
+              <a:rPr lang="en-IN" sz="2400" dirty="0"/>
+              <a:t> banking conversations contain sensitive financial and personally identifiable information. Instead, we can create a synthetic banking customer-support dataset.</a:t>
+            </a:r>
+          </a:p>
+          <a:p>
+            <a:endParaRPr lang="en-IN" sz="2400" dirty="0"/>
           </a:p>
         </p:txBody>
       </p:sp>
     </p:spTree>
     <p:extLst>
       <p:ext uri="{BB962C8B-B14F-4D97-AF65-F5344CB8AC3E}">
-        <p14:creationId xmlns:p14="http://schemas.microsoft.com/office/powerpoint/2010/main" val="2690772527"/>
+        <p14:creationId xmlns:p14="http://schemas.microsoft.com/office/powerpoint/2010/main" val="4292092617"/>
       </p:ext>
     </p:extLst>
   </p:cSld>
@@ -4437,104 +4647,6 @@
           <p:cNvPr id="2" name="Title 1">
             <a:extLst>
               <a:ext uri="{FF2B5EF4-FFF2-40B4-BE49-F238E27FC236}">
-                <a16:creationId xmlns:a16="http://schemas.microsoft.com/office/drawing/2014/main" id="{008EC106-2771-8066-4DD9-49DA5E5A541D}"/>
-              </a:ext>
-            </a:extLst>
-          </p:cNvPr>
-          <p:cNvSpPr>
-            <a:spLocks noGrp="1"/>
-          </p:cNvSpPr>
-          <p:nvPr>
-            <p:ph type="title"/>
-          </p:nvPr>
-        </p:nvSpPr>
-        <p:spPr/>
-        <p:txBody>
-          <a:bodyPr/>
-          <a:lstStyle/>
-          <a:p>
-            <a:r>
-              <a:rPr lang="en-US" dirty="0"/>
-              <a:t>Dataset</a:t>
-            </a:r>
-            <a:endParaRPr lang="en-IN" dirty="0"/>
-          </a:p>
-        </p:txBody>
-      </p:sp>
-      <p:sp>
-        <p:nvSpPr>
-          <p:cNvPr id="3" name="Content Placeholder 2">
-            <a:extLst>
-              <a:ext uri="{FF2B5EF4-FFF2-40B4-BE49-F238E27FC236}">
-                <a16:creationId xmlns:a16="http://schemas.microsoft.com/office/drawing/2014/main" id="{90066223-E67F-DE1F-A9AA-FB1F9E4E7066}"/>
-              </a:ext>
-            </a:extLst>
-          </p:cNvPr>
-          <p:cNvSpPr>
-            <a:spLocks noGrp="1"/>
-          </p:cNvSpPr>
-          <p:nvPr>
-            <p:ph idx="1"/>
-          </p:nvPr>
-        </p:nvSpPr>
-        <p:spPr/>
-        <p:txBody>
-          <a:bodyPr/>
-          <a:lstStyle/>
-          <a:p>
-            <a:r>
-              <a:rPr lang="en-US" dirty="0"/>
-              <a:t>Due to r</a:t>
-            </a:r>
-            <a:r>
-              <a:rPr lang="en-IN" dirty="0" err="1"/>
-              <a:t>eal</a:t>
-            </a:r>
-            <a:r>
-              <a:rPr lang="en-IN" dirty="0"/>
-              <a:t> banking conversations contain sensitive financial and personally identifiable information. Instead, we can create a synthetic banking customer-support dataset.</a:t>
-            </a:r>
-          </a:p>
-          <a:p>
-            <a:endParaRPr lang="en-IN" dirty="0"/>
-          </a:p>
-        </p:txBody>
-      </p:sp>
-    </p:spTree>
-    <p:extLst>
-      <p:ext uri="{BB962C8B-B14F-4D97-AF65-F5344CB8AC3E}">
-        <p14:creationId xmlns:p14="http://schemas.microsoft.com/office/powerpoint/2010/main" val="4292092617"/>
-      </p:ext>
-    </p:extLst>
-  </p:cSld>
-  <p:clrMapOvr>
-    <a:masterClrMapping/>
-  </p:clrMapOvr>
-</p:sld>
-</file>
-
-<file path=ppt/slides/slide7.xml><?xml version="1.0" encoding="utf-8"?>
-<p:sld xmlns:a="http://schemas.openxmlformats.org/drawingml/2006/main" xmlns:r="http://schemas.openxmlformats.org/officeDocument/2006/relationships" xmlns:p="http://schemas.openxmlformats.org/presentationml/2006/main">
-  <p:cSld>
-    <p:spTree>
-      <p:nvGrpSpPr>
-        <p:cNvPr id="1" name=""/>
-        <p:cNvGrpSpPr/>
-        <p:nvPr/>
-      </p:nvGrpSpPr>
-      <p:grpSpPr>
-        <a:xfrm>
-          <a:off x="0" y="0"/>
-          <a:ext cx="0" cy="0"/>
-          <a:chOff x="0" y="0"/>
-          <a:chExt cx="0" cy="0"/>
-        </a:xfrm>
-      </p:grpSpPr>
-      <p:sp>
-        <p:nvSpPr>
-          <p:cNvPr id="2" name="Title 1">
-            <a:extLst>
-              <a:ext uri="{FF2B5EF4-FFF2-40B4-BE49-F238E27FC236}">
                 <a16:creationId xmlns:a16="http://schemas.microsoft.com/office/drawing/2014/main" id="{89CAAA13-E3F3-0410-B78B-1B05EA91B141}"/>
               </a:ext>
             </a:extLst>
@@ -4575,14 +4687,14 @@
             <p:ph idx="1"/>
             <p:extLst>
               <p:ext uri="{D42A27DB-BD31-4B8C-83A1-F6EECF244321}">
-                <p14:modId xmlns:p14="http://schemas.microsoft.com/office/powerpoint/2010/main" val="1622745460"/>
+                <p14:modId xmlns:p14="http://schemas.microsoft.com/office/powerpoint/2010/main" val="1607454072"/>
               </p:ext>
             </p:extLst>
           </p:nvPr>
         </p:nvGraphicFramePr>
         <p:xfrm>
           <a:off x="3868738" y="863600"/>
-          <a:ext cx="7315200" cy="5598160"/>
+          <a:ext cx="7315200" cy="3977640"/>
         </p:xfrm>
         <a:graphic>
           <a:graphicData uri="http://schemas.openxmlformats.org/drawingml/2006/table">
@@ -4591,14 +4703,14 @@
                 <a:tableStyleId>{5C22544A-7EE6-4342-B048-85BDC9FD1C3A}</a:tableStyleId>
               </a:tblPr>
               <a:tblGrid>
-                <a:gridCol w="1401786">
+                <a:gridCol w="1887485">
                   <a:extLst>
                     <a:ext uri="{9D8B030D-6E8A-4147-A177-3AD203B41FA5}">
                       <a16:colId xmlns:a16="http://schemas.microsoft.com/office/drawing/2014/main" val="1694806031"/>
                     </a:ext>
                   </a:extLst>
                 </a:gridCol>
-                <a:gridCol w="5913414">
+                <a:gridCol w="5427715">
                   <a:extLst>
                     <a:ext uri="{9D8B030D-6E8A-4147-A177-3AD203B41FA5}">
                       <a16:colId xmlns:a16="http://schemas.microsoft.com/office/drawing/2014/main" val="911155316"/>
@@ -4992,7 +5104,7 @@
 </p:sld>
 </file>
 
-<file path=ppt/slides/slide8.xml><?xml version="1.0" encoding="utf-8"?>
+<file path=ppt/slides/slide7.xml><?xml version="1.0" encoding="utf-8"?>
 <p:sld xmlns:a="http://schemas.openxmlformats.org/drawingml/2006/main" xmlns:r="http://schemas.openxmlformats.org/officeDocument/2006/relationships" xmlns:p="http://schemas.openxmlformats.org/presentationml/2006/main">
   <p:cSld>
     <p:spTree>
@@ -5169,7 +5281,7 @@
 </p:sld>
 </file>
 
-<file path=ppt/slides/slide9.xml><?xml version="1.0" encoding="utf-8"?>
+<file path=ppt/slides/slide8.xml><?xml version="1.0" encoding="utf-8"?>
 <p:sld xmlns:a="http://schemas.openxmlformats.org/drawingml/2006/main" xmlns:r="http://schemas.openxmlformats.org/officeDocument/2006/relationships" xmlns:p="http://schemas.openxmlformats.org/presentationml/2006/main">
   <p:cSld>
     <p:spTree>
@@ -5301,6 +5413,163 @@
     <p:extLst>
       <p:ext uri="{BB962C8B-B14F-4D97-AF65-F5344CB8AC3E}">
         <p14:creationId xmlns:p14="http://schemas.microsoft.com/office/powerpoint/2010/main" val="3581882527"/>
+      </p:ext>
+    </p:extLst>
+  </p:cSld>
+  <p:clrMapOvr>
+    <a:masterClrMapping/>
+  </p:clrMapOvr>
+</p:sld>
+</file>
+
+<file path=ppt/slides/slide9.xml><?xml version="1.0" encoding="utf-8"?>
+<p:sld xmlns:a="http://schemas.openxmlformats.org/drawingml/2006/main" xmlns:r="http://schemas.openxmlformats.org/officeDocument/2006/relationships" xmlns:p="http://schemas.openxmlformats.org/presentationml/2006/main">
+  <p:cSld>
+    <p:spTree>
+      <p:nvGrpSpPr>
+        <p:cNvPr id="1" name="">
+          <a:extLst>
+            <a:ext uri="{FF2B5EF4-FFF2-40B4-BE49-F238E27FC236}">
+              <a16:creationId xmlns:a16="http://schemas.microsoft.com/office/drawing/2014/main" id="{A4EF664E-6C7F-ED31-C5F2-AC6154D413CF}"/>
+            </a:ext>
+          </a:extLst>
+        </p:cNvPr>
+        <p:cNvGrpSpPr/>
+        <p:nvPr/>
+      </p:nvGrpSpPr>
+      <p:grpSpPr>
+        <a:xfrm>
+          <a:off x="0" y="0"/>
+          <a:ext cx="0" cy="0"/>
+          <a:chOff x="0" y="0"/>
+          <a:chExt cx="0" cy="0"/>
+        </a:xfrm>
+      </p:grpSpPr>
+      <p:sp>
+        <p:nvSpPr>
+          <p:cNvPr id="2" name="Title 1">
+            <a:extLst>
+              <a:ext uri="{FF2B5EF4-FFF2-40B4-BE49-F238E27FC236}">
+                <a16:creationId xmlns:a16="http://schemas.microsoft.com/office/drawing/2014/main" id="{6EE74CBD-3BCE-AB1C-B7A0-55AF34786CB8}"/>
+              </a:ext>
+            </a:extLst>
+          </p:cNvPr>
+          <p:cNvSpPr>
+            <a:spLocks noGrp="1"/>
+          </p:cNvSpPr>
+          <p:nvPr>
+            <p:ph type="title"/>
+          </p:nvPr>
+        </p:nvSpPr>
+        <p:spPr/>
+        <p:txBody>
+          <a:bodyPr/>
+          <a:lstStyle/>
+          <a:p>
+            <a:endParaRPr lang="en-IN"/>
+          </a:p>
+        </p:txBody>
+      </p:sp>
+      <p:sp>
+        <p:nvSpPr>
+          <p:cNvPr id="3" name="Content Placeholder 2">
+            <a:extLst>
+              <a:ext uri="{FF2B5EF4-FFF2-40B4-BE49-F238E27FC236}">
+                <a16:creationId xmlns:a16="http://schemas.microsoft.com/office/drawing/2014/main" id="{85BBED03-0DBC-E411-C1AF-CE18EC85272F}"/>
+              </a:ext>
+            </a:extLst>
+          </p:cNvPr>
+          <p:cNvSpPr>
+            <a:spLocks noGrp="1"/>
+          </p:cNvSpPr>
+          <p:nvPr>
+            <p:ph idx="1"/>
+          </p:nvPr>
+        </p:nvSpPr>
+        <p:spPr/>
+        <p:txBody>
+          <a:bodyPr>
+            <a:normAutofit/>
+          </a:bodyPr>
+          <a:lstStyle/>
+          <a:p>
+            <a:r>
+              <a:rPr lang="en-IN" dirty="0"/>
+              <a:t>Anand, L. G. (2025). From Voice to Value: The Expanding Role of AI in Communication and Financial Services.</a:t>
+            </a:r>
+          </a:p>
+          <a:p>
+            <a:r>
+              <a:rPr lang="en-IN" dirty="0" err="1"/>
+              <a:t>Chitraju</a:t>
+            </a:r>
+            <a:r>
+              <a:rPr lang="en-IN" dirty="0"/>
+              <a:t>, S. (2025). Smart Systems, Smarter Decisions: AI Applications in Voice Recognition, User Support, and Financial Services. </a:t>
+            </a:r>
+            <a:r>
+              <a:rPr lang="en-IN" i="1" dirty="0"/>
+              <a:t>Smarter Decisions: AI Applications in Voice Recognition, User Support, and Financial Services (August 18, 2025)</a:t>
+            </a:r>
+            <a:r>
+              <a:rPr lang="en-IN" dirty="0"/>
+              <a:t>.</a:t>
+            </a:r>
+          </a:p>
+          <a:p>
+            <a:r>
+              <a:rPr lang="en-IN" dirty="0" err="1"/>
+              <a:t>Henkens</a:t>
+            </a:r>
+            <a:r>
+              <a:rPr lang="en-IN" dirty="0"/>
+              <a:t>, B., Schultz, C. D., De Keyser, A., &amp; Mahr, D. (2026). The sound of progress: AI voice agents in service. </a:t>
+            </a:r>
+            <a:r>
+              <a:rPr lang="en-IN" i="1" dirty="0"/>
+              <a:t>Journal of Service Management</a:t>
+            </a:r>
+            <a:r>
+              <a:rPr lang="en-IN" dirty="0"/>
+              <a:t>, </a:t>
+            </a:r>
+            <a:r>
+              <a:rPr lang="en-IN" i="1" dirty="0"/>
+              <a:t>37</a:t>
+            </a:r>
+            <a:r>
+              <a:rPr lang="en-IN" dirty="0"/>
+              <a:t>(1), 1-32.</a:t>
+            </a:r>
+          </a:p>
+          <a:p>
+            <a:r>
+              <a:rPr lang="en-IN" dirty="0"/>
+              <a:t>Parthiban, E. S., &amp; Adil, M. (2023). Trends in the AI-based banking conversational agents literature: a bibliometric review. </a:t>
+            </a:r>
+            <a:r>
+              <a:rPr lang="en-IN" i="1" dirty="0"/>
+              <a:t>Asia pacific journal of information systems</a:t>
+            </a:r>
+            <a:r>
+              <a:rPr lang="en-IN" dirty="0"/>
+              <a:t>, </a:t>
+            </a:r>
+            <a:r>
+              <a:rPr lang="en-IN" i="1" dirty="0"/>
+              <a:t>33</a:t>
+            </a:r>
+            <a:r>
+              <a:rPr lang="en-IN" dirty="0"/>
+              <a:t>(3), 702-736.</a:t>
+            </a:r>
+          </a:p>
+        </p:txBody>
+      </p:sp>
+    </p:spTree>
+    <p:extLst>
+      <p:ext uri="{BB962C8B-B14F-4D97-AF65-F5344CB8AC3E}">
+        <p14:creationId xmlns:p14="http://schemas.microsoft.com/office/powerpoint/2010/main" val="52899601"/>
       </p:ext>
     </p:extLst>
   </p:cSld>
